--- a/lecons/F3/41_FORM4_LESSON37_Local_Winds.pptx
+++ b/lecons/F3/41_FORM4_LESSON37_Local_Winds.pptx
@@ -49,9 +49,13 @@
     <p:sldId id="297" r:id="rId43"/>
     <p:sldId id="298" r:id="rId44"/>
     <p:sldId id="299" r:id="rId45"/>
+    <p:sldId id="300" r:id="rId46"/>
+    <p:sldId id="301" r:id="rId47"/>
+    <p:sldId id="302" r:id="rId48"/>
+    <p:sldId id="303" r:id="rId49"/>
   </p:sldIdLst>
   <p:notesMasterIdLst>
-    <p:notesMasterId r:id="rId46"/>
+    <p:notesMasterId r:id="rId50"/>
   </p:notesMasterIdLst>
   <p:sldSz cx="12192000" cy="6858000"/>
   <p:notesSz cx="6858000" cy="12192000"/>
@@ -721,7 +725,7 @@
           <a:p>
             <a:r>
               <a:rPr lang="en-US" dirty="0"/>
-              <a:t>Good. We want to know why the wind changes direction during the day.</a:t>
+              <a:t>Good. The pupil does not know why the wind on the coast changes direction between night and day.</a:t>
             </a:r>
             <a:endParaRPr lang="en-US" dirty="0"/>
           </a:p>
@@ -897,7 +901,7 @@
           <a:p>
             <a:r>
               <a:rPr lang="en-US" dirty="0"/>
-              <a:t>Good. Early in the morning.</a:t>
+              <a:t>Good. Very early, before sunrise.</a:t>
             </a:r>
             <a:endParaRPr lang="en-US" dirty="0"/>
           </a:p>
@@ -985,7 +989,7 @@
           <a:p>
             <a:r>
               <a:rPr lang="en-US" dirty="0"/>
-              <a:t>Question 3: Which wind brings them back? Think for a moment, then raise your hand to answer.</a:t>
+              <a:t>Question 3: When do they come back? Think for a moment, then raise your hand to answer.</a:t>
             </a:r>
             <a:endParaRPr lang="en-US" dirty="0"/>
           </a:p>
@@ -1073,7 +1077,7 @@
           <a:p>
             <a:r>
               <a:rPr lang="en-US" dirty="0"/>
-              <a:t>Good. The sea breeze in the afternoon.</a:t>
+              <a:t>Good. In the afternoon.</a:t>
             </a:r>
             <a:endParaRPr lang="en-US" dirty="0"/>
           </a:p>
@@ -1337,7 +1341,7 @@
           <a:p>
             <a:r>
               <a:rPr lang="en-US" dirty="0"/>
-              <a:t>Activity 1. Look carefully at this animation: animation: the wind by day and by night. Watch the animation to the end; it will play again.</a:t>
+              <a:t>Activity 1. Look carefully at this animation: animation: the sea breeze by day. Watch the animation to the end; it will play again.</a:t>
             </a:r>
             <a:endParaRPr lang="en-US" dirty="0"/>
           </a:p>
@@ -1425,7 +1429,7 @@
           <a:p>
             <a:r>
               <a:rPr lang="en-US" dirty="0"/>
-              <a:t>Here is the question for Activity 1: By day, does the wind blow from the sea or from the land? And at night? Take one minute to think and write your answer in your rough notebook.</a:t>
+              <a:t>Here is the question for Activity 1: By day, does the wind blow from the sea or from the land? Take one minute to think and write your answer in your rough notebook.</a:t>
             </a:r>
             <a:endParaRPr lang="en-US" dirty="0"/>
           </a:p>
@@ -1601,7 +1605,7 @@
           <a:p>
             <a:r>
               <a:rPr lang="en-US" dirty="0"/>
-              <a:t>Let us check the answer together. Day: from the sea (sea breeze). Night: from the land (land breeze).</a:t>
+              <a:t>Let us check the answer together. From the sea: this is the sea breeze.</a:t>
             </a:r>
             <a:endParaRPr lang="en-US" dirty="0"/>
           </a:p>
@@ -1865,7 +1869,7 @@
           <a:p>
             <a:r>
               <a:rPr lang="en-US" dirty="0"/>
-              <a:t>Let us check the answer together. The land breeze pushes the canoes to the sea.</a:t>
+              <a:t>Let us check the answer together. The land breeze pushes their canoes out to sea.</a:t>
             </a:r>
             <a:endParaRPr lang="en-US" dirty="0"/>
           </a:p>
@@ -1953,7 +1957,7 @@
           <a:p>
             <a:r>
               <a:rPr lang="en-US" dirty="0"/>
-              <a:t>Activity 3. Look carefully at this diagram: winds in a valley by day and by night. Observe every detail before I ask the question.</a:t>
+              <a:t>Activity 3. Look carefully at this diagram: winds in a mountain valley. Observe every detail before I ask the question.</a:t>
             </a:r>
             <a:endParaRPr lang="en-US" dirty="0"/>
           </a:p>
@@ -2305,7 +2309,7 @@
           <a:p>
             <a:r>
               <a:rPr lang="en-US" dirty="0"/>
-              <a:t>Let us copy the definitions. The key terms of this lesson are defined as follows. On this slide we have Local wind. Write each point on a new line, with the key term first, and explain it in your own words when we revise.</a:t>
+              <a:t>Let us copy the definitions. The key terms of this lesson are defined as follows. On this slide we have Local wind and Monsoon. Write each point on a new line, with the key term first, and explain it in your own words when we revise.</a:t>
             </a:r>
             <a:endParaRPr lang="en-US" dirty="0"/>
           </a:p>
@@ -2393,7 +2397,7 @@
           <a:p>
             <a:r>
               <a:rPr lang="en-US" dirty="0"/>
-              <a:t>Let us copy Types of Local Winds. The main local winds are the following. On this slide we have Sea breeze and Land breeze. Write each point on a new line, with the key term first, and explain it in your own words when we revise. When you finish, we go to the next slide.</a:t>
+              <a:t>Let us copy Land and Sea Breezes. Land and sea breezes blow as follows. Copy the point on Sea breeze on the left, then draw the diagram on the right: the sea breeze. Give it a title and label it clearly.</a:t>
             </a:r>
             <a:endParaRPr lang="en-US" dirty="0"/>
           </a:p>
@@ -2569,7 +2573,7 @@
           <a:p>
             <a:r>
               <a:rPr lang="en-US" dirty="0"/>
-              <a:t>We continue with Types of Local Winds. On this slide we have Valley breeze and Mountain breeze. Write each point on a new line, with the key term first, and explain it in your own words when we revise.</a:t>
+              <a:t>Copy the point on Land breeze on the left, then draw the diagram on the right: land and sea, valley and mountain breezes. Give it a title and label it clearly.</a:t>
             </a:r>
             <a:endParaRPr lang="en-US" dirty="0"/>
           </a:p>
@@ -2657,7 +2661,7 @@
           <a:p>
             <a:r>
               <a:rPr lang="en-US" dirty="0"/>
-              <a:t>Now draw this illustration in your notebook: the sea breeze. Give it a title and label it clearly.</a:t>
+              <a:t>We continue with Land and Sea Breezes. On this slide we have Use. Write each point on a new line, with the key term first, and explain it in your own words when we revise.</a:t>
             </a:r>
             <a:endParaRPr lang="en-US" dirty="0"/>
           </a:p>
@@ -2745,7 +2749,7 @@
           <a:p>
             <a:r>
               <a:rPr lang="en-US" dirty="0"/>
-              <a:t>Now let us check what you have understood. Question 1: Why does the sea breeze blow by day? Answer in your exercise book.</a:t>
+              <a:t>Let us copy Mountain and Valley Winds. Mountain and valley winds blow as follows. Copy the point on Valley (anabatic) breeze on the left, then draw the diagram on the right: valley and mountain breezes. Give it a title and label it clearly.</a:t>
             </a:r>
             <a:endParaRPr lang="en-US" dirty="0"/>
           </a:p>
@@ -2833,7 +2837,7 @@
           <a:p>
             <a:r>
               <a:rPr lang="en-US" dirty="0"/>
-              <a:t>The expected answer is: the land heats faster than the sea. If you got it right, well done.</a:t>
+              <a:t>We continue with Mountain and Valley Winds. On this slide we have Mountain (katabatic) breeze and Effect. Write each point on a new line, with the key term first, and explain it in your own words when we revise.</a:t>
             </a:r>
             <a:endParaRPr lang="en-US" dirty="0"/>
           </a:p>
@@ -2921,7 +2925,7 @@
           <a:p>
             <a:r>
               <a:rPr lang="en-US" dirty="0"/>
-              <a:t>Now let us check what you have understood. Question 2: Which wind blows down the slopes at night? Answer in your exercise book.</a:t>
+              <a:t>Let us copy The Monsoon. The monsoon blows as follows. Copy the point on Summer monsoon on the left, then draw the diagram on the right: the monsoon. Give it a title and label it clearly.</a:t>
             </a:r>
             <a:endParaRPr lang="en-US" dirty="0"/>
           </a:p>
@@ -3009,7 +3013,7 @@
           <a:p>
             <a:r>
               <a:rPr lang="en-US" dirty="0"/>
-              <a:t>The expected answer is: the mountain breeze. If you got it right, well done.</a:t>
+              <a:t>We continue with The Monsoon. On this slide we have Winter monsoon and Examples. Write each point on a new line, with the key term first, and explain it in your own words when we revise.</a:t>
             </a:r>
             <a:endParaRPr lang="en-US" dirty="0"/>
           </a:p>
@@ -3097,7 +3101,7 @@
           <a:p>
             <a:r>
               <a:rPr lang="en-US" dirty="0"/>
-              <a:t>Take your time to copy this part; we will continue together.</a:t>
+              <a:t>Now let us check what you have understood. Question 1: Why does the sea breeze blow by day? Answer in your exercise book.</a:t>
             </a:r>
             <a:endParaRPr lang="en-US" dirty="0"/>
           </a:p>
@@ -3185,7 +3189,7 @@
           <a:p>
             <a:r>
               <a:rPr lang="en-US" dirty="0"/>
-              <a:t>For those who need more practice, fill in the blanks in your exercise book. The answers are: number 1, sea; number 2, land; number 3, valley.</a:t>
+              <a:t>The expected answer is: the land heats faster than the sea. If you got it right, well done.</a:t>
             </a:r>
             <a:endParaRPr lang="en-US" dirty="0"/>
           </a:p>
@@ -3273,7 +3277,7 @@
           <a:p>
             <a:r>
               <a:rPr lang="en-US" dirty="0"/>
-              <a:t>For your homework: Compare the temperature of Garoua with that of Ngaoundéré (ask an adult who has travelled there). Write one sentence to say which town is cooler and one possible reason. We shall correct it at the beginning of our next lesson.</a:t>
+              <a:t>Now let us check what you have understood. Question 2: Which wind blows down the slopes at night? Answer in your exercise book.</a:t>
             </a:r>
             <a:endParaRPr lang="en-US" dirty="0"/>
           </a:p>
@@ -3361,7 +3365,7 @@
           <a:p>
             <a:r>
               <a:rPr lang="en-US" dirty="0"/>
-              <a:t>Our next lesson will be on Lesson 38: Factors of Temperature. Thank you for your attention, and see you next time.</a:t>
+              <a:t>The expected answer is: the mountain breeze. If you got it right, well done.</a:t>
             </a:r>
             <a:endParaRPr lang="en-US" dirty="0"/>
           </a:p>
@@ -3537,7 +3541,7 @@
           <a:p>
             <a:r>
               <a:rPr lang="en-US" dirty="0"/>
-              <a:t>Let us play the bilingual game. I say a word in English, and you give me the French word. Then we do the reverse.</a:t>
+              <a:t>Take your time to copy this part; we will continue together.</a:t>
             </a:r>
             <a:endParaRPr lang="en-US" dirty="0"/>
           </a:p>
@@ -3625,7 +3629,7 @@
           <a:p>
             <a:r>
               <a:rPr lang="en-US" dirty="0"/>
-              <a:t>I record this information in the official logbook of the class after the lesson.</a:t>
+              <a:t>For those who need more practice, fill in the blanks in your exercise book. The answers are: number 1, sea; number 2, land; number 3, valley.</a:t>
             </a:r>
             <a:endParaRPr lang="en-US" dirty="0"/>
           </a:p>
@@ -3713,7 +3717,7 @@
           <a:p>
             <a:r>
               <a:rPr lang="en-US" dirty="0"/>
-              <a:t>I complete the second page of the logbook: the matter taught, the evaluation, the homework and the attendance.</a:t>
+              <a:t>For your homework: Compare the temperature of Garoua with that of Ngaoundéré (ask an adult who has travelled there). Write one sentence to say which town is cooler and one possible reason. We shall correct it at the beginning of our next lesson.</a:t>
             </a:r>
             <a:endParaRPr lang="en-US" dirty="0"/>
           </a:p>
@@ -3801,7 +3805,7 @@
           <a:p>
             <a:r>
               <a:rPr lang="en-US" dirty="0"/>
-              <a:t>This slide is for me, the teacher: it gives the timing of the lesson and what to do if the projector is not available.</a:t>
+              <a:t>Our next lesson will be on Lesson 38: Factors of Temperature. Thank you for your attention, and see you next time.</a:t>
             </a:r>
             <a:endParaRPr lang="en-US" dirty="0"/>
           </a:p>
@@ -3889,7 +3893,7 @@
           <a:p>
             <a:r>
               <a:rPr lang="en-US" dirty="0"/>
-              <a:t>These are the references and picture credits used to prepare this lesson.</a:t>
+              <a:t>Let us play the bilingual game. I say a word in English, and you give me the French word. Then we do the reverse.</a:t>
             </a:r>
             <a:endParaRPr lang="en-US" dirty="0"/>
           </a:p>
@@ -3913,6 +3917,358 @@
             <a:fld id="{F7021451-1387-4CA6-816F-3879F97B5CBC}" type="slidenum">
               <a:rPr lang="en-US"/>
               <a:t>44</a:t>
+            </a:fld>
+            <a:endParaRPr lang="en-US"/>
+          </a:p>
+        </p:txBody>
+      </p:sp>
+    </p:spTree>
+    <p:extLst>
+      <p:ext uri="{BB962C8B-B14F-4D97-AF65-F5344CB8AC3E}">
+        <p14:creationId xmlns:p14="http://schemas.microsoft.com/office/powerpoint/2010/main" val="1024086991"/>
+      </p:ext>
+    </p:extLst>
+  </p:cSld>
+  <p:clrMapOvr>
+    <a:masterClrMapping/>
+  </p:clrMapOvr>
+</p:notes>
+</file>
+
+<file path=ppt/notesSlides/notesSlide45.xml><?xml version="1.0" encoding="utf-8"?>
+<p:notes xmlns:a="http://schemas.openxmlformats.org/drawingml/2006/main" xmlns:r="http://schemas.openxmlformats.org/officeDocument/2006/relationships" xmlns:p="http://schemas.openxmlformats.org/presentationml/2006/main">
+  <p:cSld>
+    <p:spTree>
+      <p:nvGrpSpPr>
+        <p:cNvPr id="1" name=""/>
+        <p:cNvGrpSpPr/>
+        <p:nvPr/>
+      </p:nvGrpSpPr>
+      <p:grpSpPr>
+        <a:xfrm>
+          <a:off x="0" y="0"/>
+          <a:ext cx="0" cy="0"/>
+          <a:chOff x="0" y="0"/>
+          <a:chExt cx="0" cy="0"/>
+        </a:xfrm>
+      </p:grpSpPr>
+      <p:sp>
+        <p:nvSpPr>
+          <p:cNvPr id="2" name="Slide Image Placeholder 1"/>
+          <p:cNvSpPr>
+            <a:spLocks noGrp="1" noRot="1" noChangeAspect="1"/>
+          </p:cNvSpPr>
+          <p:nvPr>
+            <p:ph type="sldImg"/>
+          </p:nvPr>
+        </p:nvSpPr>
+        <p:spPr/>
+      </p:sp>
+      <p:sp>
+        <p:nvSpPr>
+          <p:cNvPr id="3" name="Notes Placeholder 2"/>
+          <p:cNvSpPr>
+            <a:spLocks noGrp="1"/>
+          </p:cNvSpPr>
+          <p:nvPr>
+            <p:ph type="body" idx="1"/>
+          </p:nvPr>
+        </p:nvSpPr>
+        <p:spPr/>
+        <p:txBody>
+          <a:bodyPr/>
+          <a:lstStyle/>
+          <a:p>
+            <a:r>
+              <a:rPr lang="en-US" dirty="0"/>
+              <a:t>I record this information in the official logbook of the class after the lesson.</a:t>
+            </a:r>
+            <a:endParaRPr lang="en-US" dirty="0"/>
+          </a:p>
+        </p:txBody>
+      </p:sp>
+      <p:sp>
+        <p:nvSpPr>
+          <p:cNvPr id="4" name="Slide Number Placeholder 3"/>
+          <p:cNvSpPr>
+            <a:spLocks noGrp="1"/>
+          </p:cNvSpPr>
+          <p:nvPr>
+            <p:ph type="sldNum" sz="quarter" idx="10"/>
+          </p:nvPr>
+        </p:nvSpPr>
+        <p:spPr/>
+        <p:txBody>
+          <a:bodyPr/>
+          <a:lstStyle/>
+          <a:p>
+            <a:fld id="{F7021451-1387-4CA6-816F-3879F97B5CBC}" type="slidenum">
+              <a:rPr lang="en-US"/>
+              <a:t>45</a:t>
+            </a:fld>
+            <a:endParaRPr lang="en-US"/>
+          </a:p>
+        </p:txBody>
+      </p:sp>
+    </p:spTree>
+    <p:extLst>
+      <p:ext uri="{BB962C8B-B14F-4D97-AF65-F5344CB8AC3E}">
+        <p14:creationId xmlns:p14="http://schemas.microsoft.com/office/powerpoint/2010/main" val="1024086991"/>
+      </p:ext>
+    </p:extLst>
+  </p:cSld>
+  <p:clrMapOvr>
+    <a:masterClrMapping/>
+  </p:clrMapOvr>
+</p:notes>
+</file>
+
+<file path=ppt/notesSlides/notesSlide46.xml><?xml version="1.0" encoding="utf-8"?>
+<p:notes xmlns:a="http://schemas.openxmlformats.org/drawingml/2006/main" xmlns:r="http://schemas.openxmlformats.org/officeDocument/2006/relationships" xmlns:p="http://schemas.openxmlformats.org/presentationml/2006/main">
+  <p:cSld>
+    <p:spTree>
+      <p:nvGrpSpPr>
+        <p:cNvPr id="1" name=""/>
+        <p:cNvGrpSpPr/>
+        <p:nvPr/>
+      </p:nvGrpSpPr>
+      <p:grpSpPr>
+        <a:xfrm>
+          <a:off x="0" y="0"/>
+          <a:ext cx="0" cy="0"/>
+          <a:chOff x="0" y="0"/>
+          <a:chExt cx="0" cy="0"/>
+        </a:xfrm>
+      </p:grpSpPr>
+      <p:sp>
+        <p:nvSpPr>
+          <p:cNvPr id="2" name="Slide Image Placeholder 1"/>
+          <p:cNvSpPr>
+            <a:spLocks noGrp="1" noRot="1" noChangeAspect="1"/>
+          </p:cNvSpPr>
+          <p:nvPr>
+            <p:ph type="sldImg"/>
+          </p:nvPr>
+        </p:nvSpPr>
+        <p:spPr/>
+      </p:sp>
+      <p:sp>
+        <p:nvSpPr>
+          <p:cNvPr id="3" name="Notes Placeholder 2"/>
+          <p:cNvSpPr>
+            <a:spLocks noGrp="1"/>
+          </p:cNvSpPr>
+          <p:nvPr>
+            <p:ph type="body" idx="1"/>
+          </p:nvPr>
+        </p:nvSpPr>
+        <p:spPr/>
+        <p:txBody>
+          <a:bodyPr/>
+          <a:lstStyle/>
+          <a:p>
+            <a:r>
+              <a:rPr lang="en-US" dirty="0"/>
+              <a:t>I complete the second page of the logbook: the matter taught, the evaluation, the homework and the attendance.</a:t>
+            </a:r>
+            <a:endParaRPr lang="en-US" dirty="0"/>
+          </a:p>
+        </p:txBody>
+      </p:sp>
+      <p:sp>
+        <p:nvSpPr>
+          <p:cNvPr id="4" name="Slide Number Placeholder 3"/>
+          <p:cNvSpPr>
+            <a:spLocks noGrp="1"/>
+          </p:cNvSpPr>
+          <p:nvPr>
+            <p:ph type="sldNum" sz="quarter" idx="10"/>
+          </p:nvPr>
+        </p:nvSpPr>
+        <p:spPr/>
+        <p:txBody>
+          <a:bodyPr/>
+          <a:lstStyle/>
+          <a:p>
+            <a:fld id="{F7021451-1387-4CA6-816F-3879F97B5CBC}" type="slidenum">
+              <a:rPr lang="en-US"/>
+              <a:t>46</a:t>
+            </a:fld>
+            <a:endParaRPr lang="en-US"/>
+          </a:p>
+        </p:txBody>
+      </p:sp>
+    </p:spTree>
+    <p:extLst>
+      <p:ext uri="{BB962C8B-B14F-4D97-AF65-F5344CB8AC3E}">
+        <p14:creationId xmlns:p14="http://schemas.microsoft.com/office/powerpoint/2010/main" val="1024086991"/>
+      </p:ext>
+    </p:extLst>
+  </p:cSld>
+  <p:clrMapOvr>
+    <a:masterClrMapping/>
+  </p:clrMapOvr>
+</p:notes>
+</file>
+
+<file path=ppt/notesSlides/notesSlide47.xml><?xml version="1.0" encoding="utf-8"?>
+<p:notes xmlns:a="http://schemas.openxmlformats.org/drawingml/2006/main" xmlns:r="http://schemas.openxmlformats.org/officeDocument/2006/relationships" xmlns:p="http://schemas.openxmlformats.org/presentationml/2006/main">
+  <p:cSld>
+    <p:spTree>
+      <p:nvGrpSpPr>
+        <p:cNvPr id="1" name=""/>
+        <p:cNvGrpSpPr/>
+        <p:nvPr/>
+      </p:nvGrpSpPr>
+      <p:grpSpPr>
+        <a:xfrm>
+          <a:off x="0" y="0"/>
+          <a:ext cx="0" cy="0"/>
+          <a:chOff x="0" y="0"/>
+          <a:chExt cx="0" cy="0"/>
+        </a:xfrm>
+      </p:grpSpPr>
+      <p:sp>
+        <p:nvSpPr>
+          <p:cNvPr id="2" name="Slide Image Placeholder 1"/>
+          <p:cNvSpPr>
+            <a:spLocks noGrp="1" noRot="1" noChangeAspect="1"/>
+          </p:cNvSpPr>
+          <p:nvPr>
+            <p:ph type="sldImg"/>
+          </p:nvPr>
+        </p:nvSpPr>
+        <p:spPr/>
+      </p:sp>
+      <p:sp>
+        <p:nvSpPr>
+          <p:cNvPr id="3" name="Notes Placeholder 2"/>
+          <p:cNvSpPr>
+            <a:spLocks noGrp="1"/>
+          </p:cNvSpPr>
+          <p:nvPr>
+            <p:ph type="body" idx="1"/>
+          </p:nvPr>
+        </p:nvSpPr>
+        <p:spPr/>
+        <p:txBody>
+          <a:bodyPr/>
+          <a:lstStyle/>
+          <a:p>
+            <a:r>
+              <a:rPr lang="en-US" dirty="0"/>
+              <a:t>This slide is for me, the teacher: it gives the timing of the lesson and what to do if the projector is not available.</a:t>
+            </a:r>
+            <a:endParaRPr lang="en-US" dirty="0"/>
+          </a:p>
+        </p:txBody>
+      </p:sp>
+      <p:sp>
+        <p:nvSpPr>
+          <p:cNvPr id="4" name="Slide Number Placeholder 3"/>
+          <p:cNvSpPr>
+            <a:spLocks noGrp="1"/>
+          </p:cNvSpPr>
+          <p:nvPr>
+            <p:ph type="sldNum" sz="quarter" idx="10"/>
+          </p:nvPr>
+        </p:nvSpPr>
+        <p:spPr/>
+        <p:txBody>
+          <a:bodyPr/>
+          <a:lstStyle/>
+          <a:p>
+            <a:fld id="{F7021451-1387-4CA6-816F-3879F97B5CBC}" type="slidenum">
+              <a:rPr lang="en-US"/>
+              <a:t>47</a:t>
+            </a:fld>
+            <a:endParaRPr lang="en-US"/>
+          </a:p>
+        </p:txBody>
+      </p:sp>
+    </p:spTree>
+    <p:extLst>
+      <p:ext uri="{BB962C8B-B14F-4D97-AF65-F5344CB8AC3E}">
+        <p14:creationId xmlns:p14="http://schemas.microsoft.com/office/powerpoint/2010/main" val="1024086991"/>
+      </p:ext>
+    </p:extLst>
+  </p:cSld>
+  <p:clrMapOvr>
+    <a:masterClrMapping/>
+  </p:clrMapOvr>
+</p:notes>
+</file>
+
+<file path=ppt/notesSlides/notesSlide48.xml><?xml version="1.0" encoding="utf-8"?>
+<p:notes xmlns:a="http://schemas.openxmlformats.org/drawingml/2006/main" xmlns:r="http://schemas.openxmlformats.org/officeDocument/2006/relationships" xmlns:p="http://schemas.openxmlformats.org/presentationml/2006/main">
+  <p:cSld>
+    <p:spTree>
+      <p:nvGrpSpPr>
+        <p:cNvPr id="1" name=""/>
+        <p:cNvGrpSpPr/>
+        <p:nvPr/>
+      </p:nvGrpSpPr>
+      <p:grpSpPr>
+        <a:xfrm>
+          <a:off x="0" y="0"/>
+          <a:ext cx="0" cy="0"/>
+          <a:chOff x="0" y="0"/>
+          <a:chExt cx="0" cy="0"/>
+        </a:xfrm>
+      </p:grpSpPr>
+      <p:sp>
+        <p:nvSpPr>
+          <p:cNvPr id="2" name="Slide Image Placeholder 1"/>
+          <p:cNvSpPr>
+            <a:spLocks noGrp="1" noRot="1" noChangeAspect="1"/>
+          </p:cNvSpPr>
+          <p:nvPr>
+            <p:ph type="sldImg"/>
+          </p:nvPr>
+        </p:nvSpPr>
+        <p:spPr/>
+      </p:sp>
+      <p:sp>
+        <p:nvSpPr>
+          <p:cNvPr id="3" name="Notes Placeholder 2"/>
+          <p:cNvSpPr>
+            <a:spLocks noGrp="1"/>
+          </p:cNvSpPr>
+          <p:nvPr>
+            <p:ph type="body" idx="1"/>
+          </p:nvPr>
+        </p:nvSpPr>
+        <p:spPr/>
+        <p:txBody>
+          <a:bodyPr/>
+          <a:lstStyle/>
+          <a:p>
+            <a:r>
+              <a:rPr lang="en-US" dirty="0"/>
+              <a:t>These are the references and picture credits used to prepare this lesson.</a:t>
+            </a:r>
+            <a:endParaRPr lang="en-US" dirty="0"/>
+          </a:p>
+        </p:txBody>
+      </p:sp>
+      <p:sp>
+        <p:nvSpPr>
+          <p:cNvPr id="4" name="Slide Number Placeholder 3"/>
+          <p:cNvSpPr>
+            <a:spLocks noGrp="1"/>
+          </p:cNvSpPr>
+          <p:nvPr>
+            <p:ph type="sldNum" sz="quarter" idx="10"/>
+          </p:nvPr>
+        </p:nvSpPr>
+        <p:spPr/>
+        <p:txBody>
+          <a:bodyPr/>
+          <a:lstStyle/>
+          <a:p>
+            <a:fld id="{F7021451-1387-4CA6-816F-3879F97B5CBC}" type="slidenum">
+              <a:rPr lang="en-US"/>
+              <a:t>48</a:t>
             </a:fld>
             <a:endParaRPr lang="en-US"/>
           </a:p>
@@ -4153,7 +4509,7 @@
           <a:p>
             <a:r>
               <a:rPr lang="en-US" dirty="0"/>
-              <a:t>By the end of this lesson, you should be able to do three things. Number 1: define a local wind. Number 2: explain land and sea breezes. Number 3: explain mountain and valley breezes. Number 4: explain the monsoon.</a:t>
+              <a:t>By the end of this lesson, you should be able to do four things. Number 1: define a local wind. Number 2: explain land and sea breezes. Number 3: explain mountain and valley breezes. Number 4: explain the monsoon.</a:t>
             </a:r>
             <a:endParaRPr lang="en-US" dirty="0"/>
           </a:p>
@@ -4329,7 +4685,7 @@
           <a:p>
             <a:r>
               <a:rPr lang="en-US" dirty="0"/>
-              <a:t>Listen carefully to this situation from real life. In Kribi, fishermen leave the beach very early, before sunrise, and come back in the afternoon. They say the wind pushes their canoes to the sea in the morning and back to land later. Think about it, because I am going to ask you some questions.</a:t>
+              <a:t>Listen carefully to this situation from real life. In Kribi, fishermen leave the beach very early, before sunrise, and come back in the afternoon. They say that the wind pushes their canoes out to sea in the morning and back to land later. A pupil asks: "Why does the wind change direction between night and day?" Think about it, because I am going to ask you some questions.</a:t>
             </a:r>
             <a:endParaRPr lang="en-US" dirty="0"/>
           </a:p>
@@ -6012,7 +6368,7 @@
                 <a:ea typeface="Times New Roman" pitchFamily="34" charset="-122"/>
                 <a:cs typeface="Times New Roman" pitchFamily="34" charset="-120"/>
               </a:rPr>
-              <a:t>We want to know why the wind changes direction during the day.</a:t>
+              <a:t>The pupil does not know why the wind on the coast changes direction between night and day.</a:t>
             </a:r>
             <a:endParaRPr lang="en-US" sz="4000" dirty="0"/>
           </a:p>
@@ -6450,7 +6806,7 @@
                 <a:ea typeface="Times New Roman" pitchFamily="34" charset="-122"/>
                 <a:cs typeface="Times New Roman" pitchFamily="34" charset="-120"/>
               </a:rPr>
-              <a:t>Early in the morning.</a:t>
+              <a:t>Very early, before sunrise.</a:t>
             </a:r>
             <a:endParaRPr lang="en-US" sz="4000" dirty="0"/>
           </a:p>
@@ -6669,7 +7025,7 @@
                 <a:ea typeface="Times New Roman" pitchFamily="34" charset="-122"/>
                 <a:cs typeface="Times New Roman" pitchFamily="34" charset="-120"/>
               </a:rPr>
-              <a:t>Which wind brings them back?</a:t>
+              <a:t>When do they come back?</a:t>
             </a:r>
             <a:endParaRPr lang="en-US" sz="4000" dirty="0"/>
           </a:p>
@@ -6888,7 +7244,7 @@
                 <a:ea typeface="Times New Roman" pitchFamily="34" charset="-122"/>
                 <a:cs typeface="Times New Roman" pitchFamily="34" charset="-120"/>
               </a:rPr>
-              <a:t>The sea breeze in the afternoon.</a:t>
+              <a:t>In the afternoon.</a:t>
             </a:r>
             <a:endParaRPr lang="en-US" sz="4000" dirty="0"/>
           </a:p>
@@ -7540,7 +7896,7 @@
                 <a:ea typeface="Times New Roman" pitchFamily="34" charset="-122"/>
                 <a:cs typeface="Times New Roman" pitchFamily="34" charset="-120"/>
               </a:rPr>
-              <a:t>Animation: the wind by day and by night.</a:t>
+              <a:t>Animation: the sea breeze by day.</a:t>
             </a:r>
             <a:endParaRPr lang="en-US" sz="1800" dirty="0"/>
           </a:p>
@@ -7759,7 +8115,7 @@
                 <a:ea typeface="Times New Roman" pitchFamily="34" charset="-122"/>
                 <a:cs typeface="Times New Roman" pitchFamily="34" charset="-120"/>
               </a:rPr>
-              <a:t>By day, does the wind blow from the sea or from the land? And at night?</a:t>
+              <a:t>By day, does the wind blow from the sea or from the land?</a:t>
             </a:r>
             <a:endParaRPr lang="en-US" sz="4000" dirty="0"/>
           </a:p>
@@ -8573,7 +8929,7 @@
                 <a:ea typeface="Times New Roman" pitchFamily="34" charset="-122"/>
                 <a:cs typeface="Times New Roman" pitchFamily="34" charset="-120"/>
               </a:rPr>
-              <a:t>Day: from the sea (sea breeze). Night: from the land (land breeze).</a:t>
+              <a:t>From the sea: this is the sea breeze.</a:t>
             </a:r>
             <a:endParaRPr lang="en-US" sz="4000" dirty="0"/>
           </a:p>
@@ -9225,7 +9581,7 @@
                 <a:ea typeface="Times New Roman" pitchFamily="34" charset="-122"/>
                 <a:cs typeface="Times New Roman" pitchFamily="34" charset="-120"/>
               </a:rPr>
-              <a:t>The land breeze pushes the canoes to the sea.</a:t>
+              <a:t>The land breeze pushes their canoes out to sea.</a:t>
             </a:r>
             <a:endParaRPr lang="en-US" sz="4000" dirty="0"/>
           </a:p>
@@ -9337,7 +9693,7 @@
                 <a:ea typeface="Calibri" pitchFamily="34" charset="-122"/>
                 <a:cs typeface="Calibri" pitchFamily="34" charset="-120"/>
               </a:rPr>
-              <a:t>1. MOUNTAIN AND VALLEY BREEZES</a:t>
+              <a:t>2. MOUNTAIN AND VALLEY WINDS</a:t>
             </a:r>
             <a:endParaRPr lang="en-US" sz="1400" dirty="0"/>
           </a:p>
@@ -9439,7 +9795,7 @@
                 <a:ea typeface="Times New Roman" pitchFamily="34" charset="-122"/>
                 <a:cs typeface="Times New Roman" pitchFamily="34" charset="-120"/>
               </a:rPr>
-              <a:t>Winds in a valley by day and by night.</a:t>
+              <a:t>Winds in a mountain valley.</a:t>
             </a:r>
             <a:endParaRPr lang="en-US" sz="1800" dirty="0"/>
           </a:p>
@@ -9551,7 +9907,7 @@
                 <a:ea typeface="Calibri" pitchFamily="34" charset="-122"/>
                 <a:cs typeface="Calibri" pitchFamily="34" charset="-120"/>
               </a:rPr>
-              <a:t>1. MOUNTAIN AND VALLEY BREEZES</a:t>
+              <a:t>2. MOUNTAIN AND VALLEY WINDS</a:t>
             </a:r>
             <a:endParaRPr lang="en-US" sz="1400" dirty="0"/>
           </a:p>
@@ -9770,7 +10126,7 @@
                 <a:ea typeface="Calibri" pitchFamily="34" charset="-122"/>
                 <a:cs typeface="Calibri" pitchFamily="34" charset="-120"/>
               </a:rPr>
-              <a:t>1. MOUNTAIN AND VALLEY BREEZES</a:t>
+              <a:t>2. MOUNTAIN AND VALLEY WINDS</a:t>
             </a:r>
             <a:endParaRPr lang="en-US" sz="1400" dirty="0"/>
           </a:p>
@@ -10271,7 +10627,7 @@
         <p:spPr>
           <a:xfrm>
             <a:off x="0" y="658368"/>
-            <a:ext cx="5120640" cy="5833872"/>
+            <a:ext cx="1463040" cy="5833872"/>
           </a:xfrm>
           <a:prstGeom prst="rect">
             <a:avLst/>
@@ -10286,8 +10642,8 @@
         </p:nvSpPr>
         <p:spPr>
           <a:xfrm>
-            <a:off x="5349240" y="1005840"/>
-            <a:ext cx="6522415" cy="731520"/>
+            <a:off x="1691640" y="1005840"/>
+            <a:ext cx="10180015" cy="731520"/>
           </a:xfrm>
           <a:prstGeom prst="rect">
             <a:avLst/>
@@ -10327,8 +10683,8 @@
         </p:nvSpPr>
         <p:spPr>
           <a:xfrm>
-            <a:off x="5349240" y="1783080"/>
-            <a:ext cx="6522415" cy="4663440"/>
+            <a:off x="1691640" y="1783080"/>
+            <a:ext cx="10180015" cy="4663440"/>
           </a:xfrm>
           <a:prstGeom prst="rect">
             <a:avLst/>
@@ -10392,7 +10748,44 @@
                 <a:ea typeface="Times New Roman" pitchFamily="34" charset="-122"/>
                 <a:cs typeface="Times New Roman" pitchFamily="34" charset="-120"/>
               </a:rPr>
-              <a:t>It is a wind that blows over a small area for a short time.</a:t>
+              <a:t>It is a wind that blows over a small area for a short time, caused by local differences in temperature and pressure.</a:t>
+            </a:r>
+            <a:endParaRPr lang="en-US" sz="4000" dirty="0"/>
+          </a:p>
+          <a:p>
+            <a:pPr algn="l" indent="0" marL="0">
+              <a:spcAft>
+                <a:spcPts val="800"/>
+              </a:spcAft>
+              <a:buNone/>
+            </a:pPr>
+            <a:r>
+              <a:rPr lang="en-US" sz="4000" b="1" dirty="0">
+                <a:solidFill>
+                  <a:srgbClr val="111111"/>
+                </a:solidFill>
+                <a:latin typeface="Times New Roman" pitchFamily="34" charset="0"/>
+                <a:ea typeface="Times New Roman" pitchFamily="34" charset="-122"/>
+                <a:cs typeface="Times New Roman" pitchFamily="34" charset="-120"/>
+              </a:rPr>
+              <a:t>Monsoon: </a:t>
+            </a:r>
+            <a:pPr algn="l" indent="0" marL="0">
+              <a:spcAft>
+                <a:spcPts val="800"/>
+              </a:spcAft>
+              <a:buNone/>
+            </a:pPr>
+            <a:r>
+              <a:rPr lang="en-US" sz="4000" dirty="0">
+                <a:solidFill>
+                  <a:srgbClr val="111111"/>
+                </a:solidFill>
+                <a:latin typeface="Times New Roman" pitchFamily="34" charset="0"/>
+                <a:ea typeface="Times New Roman" pitchFamily="34" charset="-122"/>
+                <a:cs typeface="Times New Roman" pitchFamily="34" charset="-120"/>
+              </a:rPr>
+              <a:t>It is a seasonal wind that changes direction between summer and winter.</a:t>
             </a:r>
             <a:endParaRPr lang="en-US" sz="4000" dirty="0"/>
           </a:p>
@@ -10510,9 +10903,129 @@
           </a:p>
         </p:txBody>
       </p:sp>
+      <p:sp>
+        <p:nvSpPr>
+          <p:cNvPr id="3" name="Text 1"/>
+          <p:cNvSpPr/>
+          <p:nvPr/>
+        </p:nvSpPr>
+        <p:spPr>
+          <a:xfrm>
+            <a:off x="365760" y="1005840"/>
+            <a:ext cx="11460175" cy="731520"/>
+          </a:xfrm>
+          <a:prstGeom prst="rect">
+            <a:avLst/>
+          </a:prstGeom>
+          <a:noFill/>
+          <a:ln/>
+        </p:spPr>
+        <p:txBody>
+          <a:bodyPr wrap="square" lIns="0" tIns="0" rIns="0" bIns="0" rtlCol="0" anchor="ctr">
+            <a:normAutofit/>
+          </a:bodyPr>
+          <a:lstStyle/>
+          <a:p>
+            <a:pPr algn="ctr" indent="0" marL="0">
+              <a:buNone/>
+            </a:pPr>
+            <a:r>
+              <a:rPr lang="en-US" sz="3600" b="1" dirty="0">
+                <a:solidFill>
+                  <a:srgbClr val="990011"/>
+                </a:solidFill>
+                <a:latin typeface="Times New Roman" pitchFamily="34" charset="0"/>
+                <a:ea typeface="Times New Roman" pitchFamily="34" charset="-122"/>
+                <a:cs typeface="Times New Roman" pitchFamily="34" charset="-120"/>
+              </a:rPr>
+              <a:t>1. Land and Sea Breezes</a:t>
+            </a:r>
+            <a:endParaRPr lang="en-US" sz="3600" dirty="0"/>
+          </a:p>
+        </p:txBody>
+      </p:sp>
+      <p:sp>
+        <p:nvSpPr>
+          <p:cNvPr id="4" name="Text 2"/>
+          <p:cNvSpPr/>
+          <p:nvPr/>
+        </p:nvSpPr>
+        <p:spPr>
+          <a:xfrm>
+            <a:off x="365760" y="1783080"/>
+            <a:ext cx="4846320" cy="4617720"/>
+          </a:xfrm>
+          <a:prstGeom prst="rect">
+            <a:avLst/>
+          </a:prstGeom>
+          <a:noFill/>
+          <a:ln/>
+        </p:spPr>
+        <p:txBody>
+          <a:bodyPr wrap="square" lIns="0" tIns="0" rIns="0" bIns="0" rtlCol="0" anchor="t"/>
+          <a:lstStyle/>
+          <a:p>
+            <a:pPr algn="l" indent="0" marL="0">
+              <a:spcAft>
+                <a:spcPts val="800"/>
+              </a:spcAft>
+              <a:buNone/>
+            </a:pPr>
+            <a:r>
+              <a:rPr lang="en-US" sz="3600" i="1" dirty="0">
+                <a:solidFill>
+                  <a:srgbClr val="111111"/>
+                </a:solidFill>
+                <a:latin typeface="Times New Roman" pitchFamily="34" charset="0"/>
+                <a:ea typeface="Times New Roman" pitchFamily="34" charset="-122"/>
+                <a:cs typeface="Times New Roman" pitchFamily="34" charset="-120"/>
+              </a:rPr>
+              <a:t>Land and sea breezes blow as follows:</a:t>
+            </a:r>
+            <a:endParaRPr lang="en-US" sz="3600" dirty="0"/>
+          </a:p>
+          <a:p>
+            <a:pPr algn="l" indent="0" marL="0">
+              <a:spcAft>
+                <a:spcPts val="800"/>
+              </a:spcAft>
+              <a:buNone/>
+            </a:pPr>
+            <a:r>
+              <a:rPr lang="en-US" sz="3600" b="1" dirty="0">
+                <a:solidFill>
+                  <a:srgbClr val="111111"/>
+                </a:solidFill>
+                <a:latin typeface="Times New Roman" pitchFamily="34" charset="0"/>
+                <a:ea typeface="Times New Roman" pitchFamily="34" charset="-122"/>
+                <a:cs typeface="Times New Roman" pitchFamily="34" charset="-120"/>
+              </a:rPr>
+              <a:t>Sea breeze: </a:t>
+            </a:r>
+            <a:pPr algn="l" indent="0" marL="0">
+              <a:spcAft>
+                <a:spcPts val="800"/>
+              </a:spcAft>
+              <a:buNone/>
+            </a:pPr>
+            <a:r>
+              <a:rPr lang="en-US" sz="3600" dirty="0">
+                <a:solidFill>
+                  <a:srgbClr val="111111"/>
+                </a:solidFill>
+                <a:latin typeface="Times New Roman" pitchFamily="34" charset="0"/>
+                <a:ea typeface="Times New Roman" pitchFamily="34" charset="-122"/>
+                <a:cs typeface="Times New Roman" pitchFamily="34" charset="-120"/>
+              </a:rPr>
+              <a:t>By day the land heats faster than the sea, so cool air blows from the sea to the land.</a:t>
+            </a:r>
+            <a:endParaRPr lang="en-US" sz="3600" dirty="0"/>
+          </a:p>
+        </p:txBody>
+      </p:sp>
       <p:pic>
         <p:nvPicPr>
-          <p:cNvPr id="3" name="Image 0" descr="/home/claude/f4/img/minesec_sheet.png">    </p:cNvPr>
+          <p:cNvPr id="5" name="Image 0" descr="/home/claude/f4/img/v2/seabreeze_day.png">    </p:cNvPr>
           <p:cNvPicPr>
             <a:picLocks noChangeAspect="1"/>
           </p:cNvPicPr>
@@ -10526,8 +11039,8 @@
         </p:blipFill>
         <p:spPr>
           <a:xfrm>
-            <a:off x="0" y="658368"/>
-            <a:ext cx="2468880" cy="5833872"/>
+            <a:off x="5349240" y="2617506"/>
+            <a:ext cx="6659575" cy="2601397"/>
           </a:xfrm>
           <a:prstGeom prst="rect">
             <a:avLst/>
@@ -10536,14 +11049,14 @@
       </p:pic>
       <p:sp>
         <p:nvSpPr>
-          <p:cNvPr id="4" name="Text 1"/>
+          <p:cNvPr id="6" name="Text 3"/>
           <p:cNvSpPr/>
           <p:nvPr/>
         </p:nvSpPr>
         <p:spPr>
           <a:xfrm>
-            <a:off x="2697480" y="1005840"/>
-            <a:ext cx="9174175" cy="731520"/>
+            <a:off x="5349240" y="6089904"/>
+            <a:ext cx="6659575" cy="347472"/>
           </a:xfrm>
           <a:prstGeom prst="rect">
             <a:avLst/>
@@ -10552,142 +11065,24 @@
           <a:ln/>
         </p:spPr>
         <p:txBody>
-          <a:bodyPr wrap="square" lIns="0" tIns="0" rIns="0" bIns="0" rtlCol="0" anchor="ctr">
-            <a:normAutofit/>
-          </a:bodyPr>
+          <a:bodyPr wrap="square" lIns="0" tIns="0" rIns="0" bIns="0" rtlCol="0" anchor="ctr"/>
           <a:lstStyle/>
           <a:p>
             <a:pPr algn="ctr" indent="0" marL="0">
               <a:buNone/>
             </a:pPr>
             <a:r>
-              <a:rPr lang="en-US" sz="3600" b="1" dirty="0">
-                <a:solidFill>
-                  <a:srgbClr val="990011"/>
+              <a:rPr lang="en-US" sz="1600" i="1" dirty="0">
+                <a:solidFill>
+                  <a:srgbClr val="555555"/>
                 </a:solidFill>
                 <a:latin typeface="Times New Roman" pitchFamily="34" charset="0"/>
                 <a:ea typeface="Times New Roman" pitchFamily="34" charset="-122"/>
                 <a:cs typeface="Times New Roman" pitchFamily="34" charset="-120"/>
               </a:rPr>
-              <a:t>1. Types of Local Winds</a:t>
-            </a:r>
-            <a:endParaRPr lang="en-US" sz="3600" dirty="0"/>
-          </a:p>
-        </p:txBody>
-      </p:sp>
-      <p:sp>
-        <p:nvSpPr>
-          <p:cNvPr id="5" name="Text 2"/>
-          <p:cNvSpPr/>
-          <p:nvPr/>
-        </p:nvSpPr>
-        <p:spPr>
-          <a:xfrm>
-            <a:off x="2697480" y="1783080"/>
-            <a:ext cx="9174175" cy="4663440"/>
-          </a:xfrm>
-          <a:prstGeom prst="rect">
-            <a:avLst/>
-          </a:prstGeom>
-          <a:noFill/>
-          <a:ln/>
-        </p:spPr>
-        <p:txBody>
-          <a:bodyPr wrap="square" lIns="0" tIns="0" rIns="0" bIns="0" rtlCol="0" anchor="t"/>
-          <a:lstStyle/>
-          <a:p>
-            <a:pPr algn="l" indent="0" marL="0">
-              <a:spcAft>
-                <a:spcPts val="800"/>
-              </a:spcAft>
-              <a:buNone/>
-            </a:pPr>
-            <a:r>
-              <a:rPr lang="en-US" sz="4000" i="1" dirty="0">
-                <a:solidFill>
-                  <a:srgbClr val="111111"/>
-                </a:solidFill>
-                <a:latin typeface="Times New Roman" pitchFamily="34" charset="0"/>
-                <a:ea typeface="Times New Roman" pitchFamily="34" charset="-122"/>
-                <a:cs typeface="Times New Roman" pitchFamily="34" charset="-120"/>
-              </a:rPr>
-              <a:t>The main local winds are the following:</a:t>
-            </a:r>
-            <a:endParaRPr lang="en-US" sz="4000" dirty="0"/>
-          </a:p>
-          <a:p>
-            <a:pPr algn="l" indent="0" marL="0">
-              <a:spcAft>
-                <a:spcPts val="800"/>
-              </a:spcAft>
-              <a:buNone/>
-            </a:pPr>
-            <a:r>
-              <a:rPr lang="en-US" sz="4000" b="1" dirty="0">
-                <a:solidFill>
-                  <a:srgbClr val="111111"/>
-                </a:solidFill>
-                <a:latin typeface="Times New Roman" pitchFamily="34" charset="0"/>
-                <a:ea typeface="Times New Roman" pitchFamily="34" charset="-122"/>
-                <a:cs typeface="Times New Roman" pitchFamily="34" charset="-120"/>
-              </a:rPr>
-              <a:t>Sea breeze: </a:t>
-            </a:r>
-            <a:pPr algn="l" indent="0" marL="0">
-              <a:spcAft>
-                <a:spcPts val="800"/>
-              </a:spcAft>
-              <a:buNone/>
-            </a:pPr>
-            <a:r>
-              <a:rPr lang="en-US" sz="4000" dirty="0">
-                <a:solidFill>
-                  <a:srgbClr val="111111"/>
-                </a:solidFill>
-                <a:latin typeface="Times New Roman" pitchFamily="34" charset="0"/>
-                <a:ea typeface="Times New Roman" pitchFamily="34" charset="-122"/>
-                <a:cs typeface="Times New Roman" pitchFamily="34" charset="-120"/>
-              </a:rPr>
-              <a:t>By day the land is hotter than the sea, so cool air blows from the sea to the land.</a:t>
-            </a:r>
-            <a:endParaRPr lang="en-US" sz="4000" dirty="0"/>
-          </a:p>
-          <a:p>
-            <a:pPr algn="l" indent="0" marL="0">
-              <a:spcAft>
-                <a:spcPts val="800"/>
-              </a:spcAft>
-              <a:buNone/>
-            </a:pPr>
-            <a:r>
-              <a:rPr lang="en-US" sz="4000" b="1" dirty="0">
-                <a:solidFill>
-                  <a:srgbClr val="111111"/>
-                </a:solidFill>
-                <a:latin typeface="Times New Roman" pitchFamily="34" charset="0"/>
-                <a:ea typeface="Times New Roman" pitchFamily="34" charset="-122"/>
-                <a:cs typeface="Times New Roman" pitchFamily="34" charset="-120"/>
-              </a:rPr>
-              <a:t>Land breeze: </a:t>
-            </a:r>
-            <a:pPr algn="l" indent="0" marL="0">
-              <a:spcAft>
-                <a:spcPts val="800"/>
-              </a:spcAft>
-              <a:buNone/>
-            </a:pPr>
-            <a:r>
-              <a:rPr lang="en-US" sz="4000" dirty="0">
-                <a:solidFill>
-                  <a:srgbClr val="111111"/>
-                </a:solidFill>
-                <a:latin typeface="Times New Roman" pitchFamily="34" charset="0"/>
-                <a:ea typeface="Times New Roman" pitchFamily="34" charset="-122"/>
-                <a:cs typeface="Times New Roman" pitchFamily="34" charset="-120"/>
-              </a:rPr>
-              <a:t>At night the sea is warmer than the land, so air blows from the land to the sea.</a:t>
-            </a:r>
-            <a:endParaRPr lang="en-US" sz="4000" dirty="0"/>
+              <a:t>Illustration: the sea breeze</a:t>
+            </a:r>
+            <a:endParaRPr lang="en-US" sz="1600" dirty="0"/>
           </a:p>
         </p:txBody>
       </p:sp>
@@ -11812,9 +12207,109 @@
           </a:p>
         </p:txBody>
       </p:sp>
+      <p:sp>
+        <p:nvSpPr>
+          <p:cNvPr id="3" name="Text 1"/>
+          <p:cNvSpPr/>
+          <p:nvPr/>
+        </p:nvSpPr>
+        <p:spPr>
+          <a:xfrm>
+            <a:off x="365760" y="1005840"/>
+            <a:ext cx="11460175" cy="731520"/>
+          </a:xfrm>
+          <a:prstGeom prst="rect">
+            <a:avLst/>
+          </a:prstGeom>
+          <a:noFill/>
+          <a:ln/>
+        </p:spPr>
+        <p:txBody>
+          <a:bodyPr wrap="square" lIns="0" tIns="0" rIns="0" bIns="0" rtlCol="0" anchor="ctr">
+            <a:normAutofit/>
+          </a:bodyPr>
+          <a:lstStyle/>
+          <a:p>
+            <a:pPr algn="ctr" indent="0" marL="0">
+              <a:buNone/>
+            </a:pPr>
+            <a:r>
+              <a:rPr lang="en-US" sz="3600" b="1" dirty="0">
+                <a:solidFill>
+                  <a:srgbClr val="990011"/>
+                </a:solidFill>
+                <a:latin typeface="Times New Roman" pitchFamily="34" charset="0"/>
+                <a:ea typeface="Times New Roman" pitchFamily="34" charset="-122"/>
+                <a:cs typeface="Times New Roman" pitchFamily="34" charset="-120"/>
+              </a:rPr>
+              <a:t>1. Land and Sea Breezes</a:t>
+            </a:r>
+            <a:endParaRPr lang="en-US" sz="3600" dirty="0"/>
+          </a:p>
+        </p:txBody>
+      </p:sp>
+      <p:sp>
+        <p:nvSpPr>
+          <p:cNvPr id="4" name="Text 2"/>
+          <p:cNvSpPr/>
+          <p:nvPr/>
+        </p:nvSpPr>
+        <p:spPr>
+          <a:xfrm>
+            <a:off x="365760" y="1783080"/>
+            <a:ext cx="4846320" cy="4617720"/>
+          </a:xfrm>
+          <a:prstGeom prst="rect">
+            <a:avLst/>
+          </a:prstGeom>
+          <a:noFill/>
+          <a:ln/>
+        </p:spPr>
+        <p:txBody>
+          <a:bodyPr wrap="square" lIns="0" tIns="0" rIns="0" bIns="0" rtlCol="0" anchor="t"/>
+          <a:lstStyle/>
+          <a:p>
+            <a:pPr algn="l" indent="0" marL="0">
+              <a:spcAft>
+                <a:spcPts val="800"/>
+              </a:spcAft>
+              <a:buNone/>
+            </a:pPr>
+            <a:r>
+              <a:rPr lang="en-US" sz="3600" b="1" dirty="0">
+                <a:solidFill>
+                  <a:srgbClr val="111111"/>
+                </a:solidFill>
+                <a:latin typeface="Times New Roman" pitchFamily="34" charset="0"/>
+                <a:ea typeface="Times New Roman" pitchFamily="34" charset="-122"/>
+                <a:cs typeface="Times New Roman" pitchFamily="34" charset="-120"/>
+              </a:rPr>
+              <a:t>Land breeze: </a:t>
+            </a:r>
+            <a:pPr algn="l" indent="0" marL="0">
+              <a:spcAft>
+                <a:spcPts val="800"/>
+              </a:spcAft>
+              <a:buNone/>
+            </a:pPr>
+            <a:r>
+              <a:rPr lang="en-US" sz="3600" dirty="0">
+                <a:solidFill>
+                  <a:srgbClr val="111111"/>
+                </a:solidFill>
+                <a:latin typeface="Times New Roman" pitchFamily="34" charset="0"/>
+                <a:ea typeface="Times New Roman" pitchFamily="34" charset="-122"/>
+                <a:cs typeface="Times New Roman" pitchFamily="34" charset="-120"/>
+              </a:rPr>
+              <a:t>At night the land cools faster than the sea, so air blows from the land to the sea.</a:t>
+            </a:r>
+            <a:endParaRPr lang="en-US" sz="3600" dirty="0"/>
+          </a:p>
+        </p:txBody>
+      </p:sp>
       <p:pic>
         <p:nvPicPr>
-          <p:cNvPr id="3" name="Image 0" descr="/home/claude/f4/img/minesec_sheet.png">    </p:cNvPr>
+          <p:cNvPr id="5" name="Image 0" descr="/home/claude/f4/img/local_winds.png">    </p:cNvPr>
           <p:cNvPicPr>
             <a:picLocks noChangeAspect="1"/>
           </p:cNvPicPr>
@@ -11828,8 +12323,8 @@
         </p:blipFill>
         <p:spPr>
           <a:xfrm>
-            <a:off x="0" y="658368"/>
-            <a:ext cx="5120640" cy="5833872"/>
+            <a:off x="5956010" y="1783080"/>
+            <a:ext cx="5446036" cy="4270248"/>
           </a:xfrm>
           <a:prstGeom prst="rect">
             <a:avLst/>
@@ -11838,14 +12333,14 @@
       </p:pic>
       <p:sp>
         <p:nvSpPr>
-          <p:cNvPr id="4" name="Text 1"/>
+          <p:cNvPr id="6" name="Text 3"/>
           <p:cNvSpPr/>
           <p:nvPr/>
         </p:nvSpPr>
         <p:spPr>
           <a:xfrm>
-            <a:off x="5349240" y="1005840"/>
-            <a:ext cx="6522415" cy="731520"/>
+            <a:off x="5349240" y="6089904"/>
+            <a:ext cx="6659575" cy="347472"/>
           </a:xfrm>
           <a:prstGeom prst="rect">
             <a:avLst/>
@@ -11854,122 +12349,24 @@
           <a:ln/>
         </p:spPr>
         <p:txBody>
-          <a:bodyPr wrap="square" lIns="0" tIns="0" rIns="0" bIns="0" rtlCol="0" anchor="ctr">
-            <a:normAutofit/>
-          </a:bodyPr>
+          <a:bodyPr wrap="square" lIns="0" tIns="0" rIns="0" bIns="0" rtlCol="0" anchor="ctr"/>
           <a:lstStyle/>
           <a:p>
             <a:pPr algn="ctr" indent="0" marL="0">
               <a:buNone/>
             </a:pPr>
             <a:r>
-              <a:rPr lang="en-US" sz="3600" b="1" dirty="0">
-                <a:solidFill>
-                  <a:srgbClr val="990011"/>
+              <a:rPr lang="en-US" sz="1600" i="1" dirty="0">
+                <a:solidFill>
+                  <a:srgbClr val="555555"/>
                 </a:solidFill>
                 <a:latin typeface="Times New Roman" pitchFamily="34" charset="0"/>
                 <a:ea typeface="Times New Roman" pitchFamily="34" charset="-122"/>
                 <a:cs typeface="Times New Roman" pitchFamily="34" charset="-120"/>
               </a:rPr>
-              <a:t>1. Types of Local Winds (continued)</a:t>
-            </a:r>
-            <a:endParaRPr lang="en-US" sz="3600" dirty="0"/>
-          </a:p>
-        </p:txBody>
-      </p:sp>
-      <p:sp>
-        <p:nvSpPr>
-          <p:cNvPr id="5" name="Text 2"/>
-          <p:cNvSpPr/>
-          <p:nvPr/>
-        </p:nvSpPr>
-        <p:spPr>
-          <a:xfrm>
-            <a:off x="5349240" y="1783080"/>
-            <a:ext cx="6522415" cy="4663440"/>
-          </a:xfrm>
-          <a:prstGeom prst="rect">
-            <a:avLst/>
-          </a:prstGeom>
-          <a:noFill/>
-          <a:ln/>
-        </p:spPr>
-        <p:txBody>
-          <a:bodyPr wrap="square" lIns="0" tIns="0" rIns="0" bIns="0" rtlCol="0" anchor="t"/>
-          <a:lstStyle/>
-          <a:p>
-            <a:pPr algn="l" indent="0" marL="0">
-              <a:spcAft>
-                <a:spcPts val="800"/>
-              </a:spcAft>
-              <a:buNone/>
-            </a:pPr>
-            <a:r>
-              <a:rPr lang="en-US" sz="4000" b="1" dirty="0">
-                <a:solidFill>
-                  <a:srgbClr val="111111"/>
-                </a:solidFill>
-                <a:latin typeface="Times New Roman" pitchFamily="34" charset="0"/>
-                <a:ea typeface="Times New Roman" pitchFamily="34" charset="-122"/>
-                <a:cs typeface="Times New Roman" pitchFamily="34" charset="-120"/>
-              </a:rPr>
-              <a:t>Valley breeze: </a:t>
-            </a:r>
-            <a:pPr algn="l" indent="0" marL="0">
-              <a:spcAft>
-                <a:spcPts val="800"/>
-              </a:spcAft>
-              <a:buNone/>
-            </a:pPr>
-            <a:r>
-              <a:rPr lang="en-US" sz="4000" dirty="0">
-                <a:solidFill>
-                  <a:srgbClr val="111111"/>
-                </a:solidFill>
-                <a:latin typeface="Times New Roman" pitchFamily="34" charset="0"/>
-                <a:ea typeface="Times New Roman" pitchFamily="34" charset="-122"/>
-                <a:cs typeface="Times New Roman" pitchFamily="34" charset="-120"/>
-              </a:rPr>
-              <a:t>By day warm air rises up the mountain slopes from the valley.</a:t>
-            </a:r>
-            <a:endParaRPr lang="en-US" sz="4000" dirty="0"/>
-          </a:p>
-          <a:p>
-            <a:pPr algn="l" indent="0" marL="0">
-              <a:spcAft>
-                <a:spcPts val="800"/>
-              </a:spcAft>
-              <a:buNone/>
-            </a:pPr>
-            <a:r>
-              <a:rPr lang="en-US" sz="4000" b="1" dirty="0">
-                <a:solidFill>
-                  <a:srgbClr val="111111"/>
-                </a:solidFill>
-                <a:latin typeface="Times New Roman" pitchFamily="34" charset="0"/>
-                <a:ea typeface="Times New Roman" pitchFamily="34" charset="-122"/>
-                <a:cs typeface="Times New Roman" pitchFamily="34" charset="-120"/>
-              </a:rPr>
-              <a:t>Mountain breeze: </a:t>
-            </a:r>
-            <a:pPr algn="l" indent="0" marL="0">
-              <a:spcAft>
-                <a:spcPts val="800"/>
-              </a:spcAft>
-              <a:buNone/>
-            </a:pPr>
-            <a:r>
-              <a:rPr lang="en-US" sz="4000" dirty="0">
-                <a:solidFill>
-                  <a:srgbClr val="111111"/>
-                </a:solidFill>
-                <a:latin typeface="Times New Roman" pitchFamily="34" charset="0"/>
-                <a:ea typeface="Times New Roman" pitchFamily="34" charset="-122"/>
-                <a:cs typeface="Times New Roman" pitchFamily="34" charset="-120"/>
-              </a:rPr>
-              <a:t>At night cold air flows down the slopes into the valley.</a:t>
-            </a:r>
-            <a:endParaRPr lang="en-US" sz="4000" dirty="0"/>
+              <a:t>Illustration: land and sea, valley and mountain breezes</a:t>
+            </a:r>
+            <a:endParaRPr lang="en-US" sz="1600" dirty="0"/>
           </a:p>
         </p:txBody>
       </p:sp>
@@ -12085,48 +12482,9 @@
           </a:p>
         </p:txBody>
       </p:sp>
-      <p:sp>
-        <p:nvSpPr>
-          <p:cNvPr id="3" name="Text 1"/>
-          <p:cNvSpPr/>
-          <p:nvPr/>
-        </p:nvSpPr>
-        <p:spPr>
-          <a:xfrm>
-            <a:off x="457200" y="1005840"/>
-            <a:ext cx="11277295" cy="731520"/>
-          </a:xfrm>
-          <a:prstGeom prst="rect">
-            <a:avLst/>
-          </a:prstGeom>
-          <a:noFill/>
-          <a:ln/>
-        </p:spPr>
-        <p:txBody>
-          <a:bodyPr wrap="square" lIns="0" tIns="0" rIns="0" bIns="0" rtlCol="0" anchor="ctr"/>
-          <a:lstStyle/>
-          <a:p>
-            <a:pPr algn="ctr" indent="0" marL="0">
-              <a:buNone/>
-            </a:pPr>
-            <a:r>
-              <a:rPr lang="en-US" sz="3600" b="1" dirty="0">
-                <a:solidFill>
-                  <a:srgbClr val="990011"/>
-                </a:solidFill>
-                <a:latin typeface="Times New Roman" pitchFamily="34" charset="0"/>
-                <a:ea typeface="Times New Roman" pitchFamily="34" charset="-122"/>
-                <a:cs typeface="Times New Roman" pitchFamily="34" charset="-120"/>
-              </a:rPr>
-              <a:t>1. Types of Local Winds</a:t>
-            </a:r>
-            <a:endParaRPr lang="en-US" sz="3600" dirty="0"/>
-          </a:p>
-        </p:txBody>
-      </p:sp>
       <p:pic>
         <p:nvPicPr>
-          <p:cNvPr id="4" name="Image 0" descr="/home/claude/f4/img/v2/seabreeze_day.png">    </p:cNvPr>
+          <p:cNvPr id="3" name="Image 0" descr="/home/claude/f4/img/minesec_sheet.png">    </p:cNvPr>
           <p:cNvPicPr>
             <a:picLocks noChangeAspect="1"/>
           </p:cNvPicPr>
@@ -12140,8 +12498,8 @@
         </p:blipFill>
         <p:spPr>
           <a:xfrm>
-            <a:off x="629930" y="1783080"/>
-            <a:ext cx="10931835" cy="4270248"/>
+            <a:off x="0" y="658368"/>
+            <a:ext cx="5120640" cy="5833872"/>
           </a:xfrm>
           <a:prstGeom prst="rect">
             <a:avLst/>
@@ -12150,14 +12508,14 @@
       </p:pic>
       <p:sp>
         <p:nvSpPr>
-          <p:cNvPr id="5" name="Text 2"/>
+          <p:cNvPr id="4" name="Text 1"/>
           <p:cNvSpPr/>
           <p:nvPr/>
         </p:nvSpPr>
         <p:spPr>
           <a:xfrm>
-            <a:off x="457200" y="6089904"/>
-            <a:ext cx="11277295" cy="347472"/>
+            <a:off x="5349240" y="1005840"/>
+            <a:ext cx="6522415" cy="731520"/>
           </a:xfrm>
           <a:prstGeom prst="rect">
             <a:avLst/>
@@ -12166,24 +12524,85 @@
           <a:ln/>
         </p:spPr>
         <p:txBody>
-          <a:bodyPr wrap="square" lIns="0" tIns="0" rIns="0" bIns="0" rtlCol="0" anchor="ctr"/>
+          <a:bodyPr wrap="square" lIns="0" tIns="0" rIns="0" bIns="0" rtlCol="0" anchor="ctr">
+            <a:normAutofit/>
+          </a:bodyPr>
           <a:lstStyle/>
           <a:p>
             <a:pPr algn="ctr" indent="0" marL="0">
               <a:buNone/>
             </a:pPr>
             <a:r>
-              <a:rPr lang="en-US" sz="1800" i="1" dirty="0">
-                <a:solidFill>
-                  <a:srgbClr val="555555"/>
+              <a:rPr lang="en-US" sz="3600" b="1" dirty="0">
+                <a:solidFill>
+                  <a:srgbClr val="990011"/>
                 </a:solidFill>
                 <a:latin typeface="Times New Roman" pitchFamily="34" charset="0"/>
                 <a:ea typeface="Times New Roman" pitchFamily="34" charset="-122"/>
                 <a:cs typeface="Times New Roman" pitchFamily="34" charset="-120"/>
               </a:rPr>
-              <a:t>Illustration: the sea breeze</a:t>
-            </a:r>
-            <a:endParaRPr lang="en-US" sz="1800" dirty="0"/>
+              <a:t>1. Land and Sea Breezes</a:t>
+            </a:r>
+            <a:endParaRPr lang="en-US" sz="3600" dirty="0"/>
+          </a:p>
+        </p:txBody>
+      </p:sp>
+      <p:sp>
+        <p:nvSpPr>
+          <p:cNvPr id="5" name="Text 2"/>
+          <p:cNvSpPr/>
+          <p:nvPr/>
+        </p:nvSpPr>
+        <p:spPr>
+          <a:xfrm>
+            <a:off x="5349240" y="1783080"/>
+            <a:ext cx="6522415" cy="4663440"/>
+          </a:xfrm>
+          <a:prstGeom prst="rect">
+            <a:avLst/>
+          </a:prstGeom>
+          <a:noFill/>
+          <a:ln/>
+        </p:spPr>
+        <p:txBody>
+          <a:bodyPr wrap="square" lIns="0" tIns="0" rIns="0" bIns="0" rtlCol="0" anchor="t"/>
+          <a:lstStyle/>
+          <a:p>
+            <a:pPr algn="l" indent="0" marL="0">
+              <a:spcAft>
+                <a:spcPts val="800"/>
+              </a:spcAft>
+              <a:buNone/>
+            </a:pPr>
+            <a:r>
+              <a:rPr lang="en-US" sz="4000" b="1" dirty="0">
+                <a:solidFill>
+                  <a:srgbClr val="111111"/>
+                </a:solidFill>
+                <a:latin typeface="Times New Roman" pitchFamily="34" charset="0"/>
+                <a:ea typeface="Times New Roman" pitchFamily="34" charset="-122"/>
+                <a:cs typeface="Times New Roman" pitchFamily="34" charset="-120"/>
+              </a:rPr>
+              <a:t>Use: </a:t>
+            </a:r>
+            <a:pPr algn="l" indent="0" marL="0">
+              <a:spcAft>
+                <a:spcPts val="800"/>
+              </a:spcAft>
+              <a:buNone/>
+            </a:pPr>
+            <a:r>
+              <a:rPr lang="en-US" sz="4000" dirty="0">
+                <a:solidFill>
+                  <a:srgbClr val="111111"/>
+                </a:solidFill>
+                <a:latin typeface="Times New Roman" pitchFamily="34" charset="0"/>
+                <a:ea typeface="Times New Roman" pitchFamily="34" charset="-122"/>
+                <a:cs typeface="Times New Roman" pitchFamily="34" charset="-120"/>
+              </a:rPr>
+              <a:t>Fishermen go out with the land breeze and return with the sea breeze.</a:t>
+            </a:r>
+            <a:endParaRPr lang="en-US" sz="4000" dirty="0"/>
           </a:p>
         </p:txBody>
       </p:sp>
@@ -12293,15 +12712,135 @@
                 <a:ea typeface="Calibri" pitchFamily="34" charset="-122"/>
                 <a:cs typeface="Calibri" pitchFamily="34" charset="-120"/>
               </a:rPr>
-              <a:t>FORMATIVE EVALUATION</a:t>
+              <a:t>BOARD SUMMARY</a:t>
             </a:r>
             <a:endParaRPr lang="en-US" sz="1400" dirty="0"/>
+          </a:p>
+        </p:txBody>
+      </p:sp>
+      <p:sp>
+        <p:nvSpPr>
+          <p:cNvPr id="3" name="Text 1"/>
+          <p:cNvSpPr/>
+          <p:nvPr/>
+        </p:nvSpPr>
+        <p:spPr>
+          <a:xfrm>
+            <a:off x="365760" y="1005840"/>
+            <a:ext cx="11460175" cy="731520"/>
+          </a:xfrm>
+          <a:prstGeom prst="rect">
+            <a:avLst/>
+          </a:prstGeom>
+          <a:noFill/>
+          <a:ln/>
+        </p:spPr>
+        <p:txBody>
+          <a:bodyPr wrap="square" lIns="0" tIns="0" rIns="0" bIns="0" rtlCol="0" anchor="ctr">
+            <a:normAutofit/>
+          </a:bodyPr>
+          <a:lstStyle/>
+          <a:p>
+            <a:pPr algn="ctr" indent="0" marL="0">
+              <a:buNone/>
+            </a:pPr>
+            <a:r>
+              <a:rPr lang="en-US" sz="3600" b="1" dirty="0">
+                <a:solidFill>
+                  <a:srgbClr val="990011"/>
+                </a:solidFill>
+                <a:latin typeface="Times New Roman" pitchFamily="34" charset="0"/>
+                <a:ea typeface="Times New Roman" pitchFamily="34" charset="-122"/>
+                <a:cs typeface="Times New Roman" pitchFamily="34" charset="-120"/>
+              </a:rPr>
+              <a:t>2. Mountain and Valley Winds</a:t>
+            </a:r>
+            <a:endParaRPr lang="en-US" sz="3600" dirty="0"/>
+          </a:p>
+        </p:txBody>
+      </p:sp>
+      <p:sp>
+        <p:nvSpPr>
+          <p:cNvPr id="4" name="Text 2"/>
+          <p:cNvSpPr/>
+          <p:nvPr/>
+        </p:nvSpPr>
+        <p:spPr>
+          <a:xfrm>
+            <a:off x="365760" y="1783080"/>
+            <a:ext cx="4846320" cy="4617720"/>
+          </a:xfrm>
+          <a:prstGeom prst="rect">
+            <a:avLst/>
+          </a:prstGeom>
+          <a:noFill/>
+          <a:ln/>
+        </p:spPr>
+        <p:txBody>
+          <a:bodyPr wrap="square" lIns="0" tIns="0" rIns="0" bIns="0" rtlCol="0" anchor="t"/>
+          <a:lstStyle/>
+          <a:p>
+            <a:pPr algn="l" indent="0" marL="0">
+              <a:spcAft>
+                <a:spcPts val="800"/>
+              </a:spcAft>
+              <a:buNone/>
+            </a:pPr>
+            <a:r>
+              <a:rPr lang="en-US" sz="3600" i="1" dirty="0">
+                <a:solidFill>
+                  <a:srgbClr val="111111"/>
+                </a:solidFill>
+                <a:latin typeface="Times New Roman" pitchFamily="34" charset="0"/>
+                <a:ea typeface="Times New Roman" pitchFamily="34" charset="-122"/>
+                <a:cs typeface="Times New Roman" pitchFamily="34" charset="-120"/>
+              </a:rPr>
+              <a:t>Mountain and valley winds blow as follows:</a:t>
+            </a:r>
+            <a:endParaRPr lang="en-US" sz="3600" dirty="0"/>
+          </a:p>
+          <a:p>
+            <a:pPr algn="l" indent="0" marL="0">
+              <a:spcAft>
+                <a:spcPts val="800"/>
+              </a:spcAft>
+              <a:buNone/>
+            </a:pPr>
+            <a:r>
+              <a:rPr lang="en-US" sz="3600" b="1" dirty="0">
+                <a:solidFill>
+                  <a:srgbClr val="111111"/>
+                </a:solidFill>
+                <a:latin typeface="Times New Roman" pitchFamily="34" charset="0"/>
+                <a:ea typeface="Times New Roman" pitchFamily="34" charset="-122"/>
+                <a:cs typeface="Times New Roman" pitchFamily="34" charset="-120"/>
+              </a:rPr>
+              <a:t>Valley (anabatic) breeze: </a:t>
+            </a:r>
+            <a:pPr algn="l" indent="0" marL="0">
+              <a:spcAft>
+                <a:spcPts val="800"/>
+              </a:spcAft>
+              <a:buNone/>
+            </a:pPr>
+            <a:r>
+              <a:rPr lang="en-US" sz="3600" dirty="0">
+                <a:solidFill>
+                  <a:srgbClr val="111111"/>
+                </a:solidFill>
+                <a:latin typeface="Times New Roman" pitchFamily="34" charset="0"/>
+                <a:ea typeface="Times New Roman" pitchFamily="34" charset="-122"/>
+                <a:cs typeface="Times New Roman" pitchFamily="34" charset="-120"/>
+              </a:rPr>
+              <a:t>By day the slopes are heated, so warm air rises up the slopes from the valley.</a:t>
+            </a:r>
+            <a:endParaRPr lang="en-US" sz="3600" dirty="0"/>
           </a:p>
         </p:txBody>
       </p:sp>
       <p:pic>
         <p:nvPicPr>
-          <p:cNvPr id="3" name="Image 0" descr="/home/claude/f4/img/minesec_sheet.png">    </p:cNvPr>
+          <p:cNvPr id="5" name="Image 0" descr="/home/claude/f4/img/v2/mountain_valley_big.png">    </p:cNvPr>
           <p:cNvPicPr>
             <a:picLocks noChangeAspect="1"/>
           </p:cNvPicPr>
@@ -12315,8 +12854,8 @@
         </p:blipFill>
         <p:spPr>
           <a:xfrm>
-            <a:off x="0" y="658368"/>
-            <a:ext cx="5120640" cy="5833872"/>
+            <a:off x="5349240" y="2617506"/>
+            <a:ext cx="6659575" cy="2601397"/>
           </a:xfrm>
           <a:prstGeom prst="rect">
             <a:avLst/>
@@ -12325,14 +12864,14 @@
       </p:pic>
       <p:sp>
         <p:nvSpPr>
-          <p:cNvPr id="4" name="Text 1"/>
+          <p:cNvPr id="6" name="Text 3"/>
           <p:cNvSpPr/>
           <p:nvPr/>
         </p:nvSpPr>
         <p:spPr>
           <a:xfrm>
-            <a:off x="5349240" y="1005840"/>
-            <a:ext cx="6522415" cy="731520"/>
+            <a:off x="5349240" y="6089904"/>
+            <a:ext cx="6659575" cy="347472"/>
           </a:xfrm>
           <a:prstGeom prst="rect">
             <a:avLst/>
@@ -12341,68 +12880,24 @@
           <a:ln/>
         </p:spPr>
         <p:txBody>
-          <a:bodyPr wrap="square" lIns="0" tIns="0" rIns="0" bIns="0" rtlCol="0" anchor="ctr">
-            <a:normAutofit/>
-          </a:bodyPr>
+          <a:bodyPr wrap="square" lIns="0" tIns="0" rIns="0" bIns="0" rtlCol="0" anchor="ctr"/>
           <a:lstStyle/>
           <a:p>
             <a:pPr algn="ctr" indent="0" marL="0">
               <a:buNone/>
             </a:pPr>
             <a:r>
-              <a:rPr lang="en-US" sz="3600" b="1" dirty="0">
-                <a:solidFill>
-                  <a:srgbClr val="990011"/>
+              <a:rPr lang="en-US" sz="1600" i="1" dirty="0">
+                <a:solidFill>
+                  <a:srgbClr val="555555"/>
                 </a:solidFill>
                 <a:latin typeface="Times New Roman" pitchFamily="34" charset="0"/>
                 <a:ea typeface="Times New Roman" pitchFamily="34" charset="-122"/>
                 <a:cs typeface="Times New Roman" pitchFamily="34" charset="-120"/>
               </a:rPr>
-              <a:t>Evaluation 1</a:t>
-            </a:r>
-            <a:endParaRPr lang="en-US" sz="3600" dirty="0"/>
-          </a:p>
-        </p:txBody>
-      </p:sp>
-      <p:sp>
-        <p:nvSpPr>
-          <p:cNvPr id="5" name="Text 2"/>
-          <p:cNvSpPr/>
-          <p:nvPr/>
-        </p:nvSpPr>
-        <p:spPr>
-          <a:xfrm>
-            <a:off x="5349240" y="1783080"/>
-            <a:ext cx="6522415" cy="4663440"/>
-          </a:xfrm>
-          <a:prstGeom prst="rect">
-            <a:avLst/>
-          </a:prstGeom>
-          <a:noFill/>
-          <a:ln/>
-        </p:spPr>
-        <p:txBody>
-          <a:bodyPr wrap="square" lIns="0" tIns="0" rIns="0" bIns="0" rtlCol="0" anchor="t"/>
-          <a:lstStyle/>
-          <a:p>
-            <a:pPr algn="l" indent="0" marL="0">
-              <a:spcAft>
-                <a:spcPts val="800"/>
-              </a:spcAft>
-              <a:buNone/>
-            </a:pPr>
-            <a:r>
-              <a:rPr lang="en-US" sz="4000" dirty="0">
-                <a:solidFill>
-                  <a:srgbClr val="111111"/>
-                </a:solidFill>
-                <a:latin typeface="Times New Roman" pitchFamily="34" charset="0"/>
-                <a:ea typeface="Times New Roman" pitchFamily="34" charset="-122"/>
-                <a:cs typeface="Times New Roman" pitchFamily="34" charset="-120"/>
-              </a:rPr>
-              <a:t>Why does the sea breeze blow by day?</a:t>
-            </a:r>
-            <a:endParaRPr lang="en-US" sz="4000" dirty="0"/>
+              <a:t>Illustration: valley and mountain breezes</a:t>
+            </a:r>
+            <a:endParaRPr lang="en-US" sz="1600" dirty="0"/>
           </a:p>
         </p:txBody>
       </p:sp>
@@ -12512,7 +13007,7 @@
                 <a:ea typeface="Calibri" pitchFamily="34" charset="-122"/>
                 <a:cs typeface="Calibri" pitchFamily="34" charset="-120"/>
               </a:rPr>
-              <a:t>FORMATIVE EVALUATION</a:t>
+              <a:t>BOARD SUMMARY</a:t>
             </a:r>
             <a:endParaRPr lang="en-US" sz="1400" dirty="0"/>
           </a:p>
@@ -12577,7 +13072,7 @@
                 <a:ea typeface="Times New Roman" pitchFamily="34" charset="-122"/>
                 <a:cs typeface="Times New Roman" pitchFamily="34" charset="-120"/>
               </a:rPr>
-              <a:t>Expected Answer</a:t>
+              <a:t>2. Mountain and Valley Winds</a:t>
             </a:r>
             <a:endParaRPr lang="en-US" sz="3600" dirty="0"/>
           </a:p>
@@ -12611,7 +13106,7 @@
               <a:buNone/>
             </a:pPr>
             <a:r>
-              <a:rPr lang="en-US" sz="4000" dirty="0">
+              <a:rPr lang="en-US" sz="4000" b="1" dirty="0">
                 <a:solidFill>
                   <a:srgbClr val="111111"/>
                 </a:solidFill>
@@ -12619,7 +13114,61 @@
                 <a:ea typeface="Times New Roman" pitchFamily="34" charset="-122"/>
                 <a:cs typeface="Times New Roman" pitchFamily="34" charset="-120"/>
               </a:rPr>
-              <a:t>The land heats faster than the sea.</a:t>
+              <a:t>Mountain (katabatic) breeze: </a:t>
+            </a:r>
+            <a:pPr algn="l" indent="0" marL="0">
+              <a:spcAft>
+                <a:spcPts val="800"/>
+              </a:spcAft>
+              <a:buNone/>
+            </a:pPr>
+            <a:r>
+              <a:rPr lang="en-US" sz="4000" dirty="0">
+                <a:solidFill>
+                  <a:srgbClr val="111111"/>
+                </a:solidFill>
+                <a:latin typeface="Times New Roman" pitchFamily="34" charset="0"/>
+                <a:ea typeface="Times New Roman" pitchFamily="34" charset="-122"/>
+                <a:cs typeface="Times New Roman" pitchFamily="34" charset="-120"/>
+              </a:rPr>
+              <a:t>At night cold, heavy air flows down the slopes into the valley.</a:t>
+            </a:r>
+            <a:endParaRPr lang="en-US" sz="4000" dirty="0"/>
+          </a:p>
+          <a:p>
+            <a:pPr algn="l" indent="0" marL="0">
+              <a:spcAft>
+                <a:spcPts val="800"/>
+              </a:spcAft>
+              <a:buNone/>
+            </a:pPr>
+            <a:r>
+              <a:rPr lang="en-US" sz="4000" b="1" dirty="0">
+                <a:solidFill>
+                  <a:srgbClr val="111111"/>
+                </a:solidFill>
+                <a:latin typeface="Times New Roman" pitchFamily="34" charset="0"/>
+                <a:ea typeface="Times New Roman" pitchFamily="34" charset="-122"/>
+                <a:cs typeface="Times New Roman" pitchFamily="34" charset="-120"/>
+              </a:rPr>
+              <a:t>Effect: </a:t>
+            </a:r>
+            <a:pPr algn="l" indent="0" marL="0">
+              <a:spcAft>
+                <a:spcPts val="800"/>
+              </a:spcAft>
+              <a:buNone/>
+            </a:pPr>
+            <a:r>
+              <a:rPr lang="en-US" sz="4000" dirty="0">
+                <a:solidFill>
+                  <a:srgbClr val="111111"/>
+                </a:solidFill>
+                <a:latin typeface="Times New Roman" pitchFamily="34" charset="0"/>
+                <a:ea typeface="Times New Roman" pitchFamily="34" charset="-122"/>
+                <a:cs typeface="Times New Roman" pitchFamily="34" charset="-120"/>
+              </a:rPr>
+              <a:t>Cold air collects in valleys at night and can form fog or frost.</a:t>
             </a:r>
             <a:endParaRPr lang="en-US" sz="4000" dirty="0"/>
           </a:p>
@@ -12731,15 +13280,135 @@
                 <a:ea typeface="Calibri" pitchFamily="34" charset="-122"/>
                 <a:cs typeface="Calibri" pitchFamily="34" charset="-120"/>
               </a:rPr>
-              <a:t>FORMATIVE EVALUATION</a:t>
+              <a:t>BOARD SUMMARY</a:t>
             </a:r>
             <a:endParaRPr lang="en-US" sz="1400" dirty="0"/>
+          </a:p>
+        </p:txBody>
+      </p:sp>
+      <p:sp>
+        <p:nvSpPr>
+          <p:cNvPr id="3" name="Text 1"/>
+          <p:cNvSpPr/>
+          <p:nvPr/>
+        </p:nvSpPr>
+        <p:spPr>
+          <a:xfrm>
+            <a:off x="365760" y="1005840"/>
+            <a:ext cx="11460175" cy="731520"/>
+          </a:xfrm>
+          <a:prstGeom prst="rect">
+            <a:avLst/>
+          </a:prstGeom>
+          <a:noFill/>
+          <a:ln/>
+        </p:spPr>
+        <p:txBody>
+          <a:bodyPr wrap="square" lIns="0" tIns="0" rIns="0" bIns="0" rtlCol="0" anchor="ctr">
+            <a:normAutofit/>
+          </a:bodyPr>
+          <a:lstStyle/>
+          <a:p>
+            <a:pPr algn="ctr" indent="0" marL="0">
+              <a:buNone/>
+            </a:pPr>
+            <a:r>
+              <a:rPr lang="en-US" sz="3600" b="1" dirty="0">
+                <a:solidFill>
+                  <a:srgbClr val="990011"/>
+                </a:solidFill>
+                <a:latin typeface="Times New Roman" pitchFamily="34" charset="0"/>
+                <a:ea typeface="Times New Roman" pitchFamily="34" charset="-122"/>
+                <a:cs typeface="Times New Roman" pitchFamily="34" charset="-120"/>
+              </a:rPr>
+              <a:t>3. The Monsoon</a:t>
+            </a:r>
+            <a:endParaRPr lang="en-US" sz="3600" dirty="0"/>
+          </a:p>
+        </p:txBody>
+      </p:sp>
+      <p:sp>
+        <p:nvSpPr>
+          <p:cNvPr id="4" name="Text 2"/>
+          <p:cNvSpPr/>
+          <p:nvPr/>
+        </p:nvSpPr>
+        <p:spPr>
+          <a:xfrm>
+            <a:off x="365760" y="1783080"/>
+            <a:ext cx="4846320" cy="4617720"/>
+          </a:xfrm>
+          <a:prstGeom prst="rect">
+            <a:avLst/>
+          </a:prstGeom>
+          <a:noFill/>
+          <a:ln/>
+        </p:spPr>
+        <p:txBody>
+          <a:bodyPr wrap="square" lIns="0" tIns="0" rIns="0" bIns="0" rtlCol="0" anchor="t"/>
+          <a:lstStyle/>
+          <a:p>
+            <a:pPr algn="l" indent="0" marL="0">
+              <a:spcAft>
+                <a:spcPts val="800"/>
+              </a:spcAft>
+              <a:buNone/>
+            </a:pPr>
+            <a:r>
+              <a:rPr lang="en-US" sz="3600" i="1" dirty="0">
+                <a:solidFill>
+                  <a:srgbClr val="111111"/>
+                </a:solidFill>
+                <a:latin typeface="Times New Roman" pitchFamily="34" charset="0"/>
+                <a:ea typeface="Times New Roman" pitchFamily="34" charset="-122"/>
+                <a:cs typeface="Times New Roman" pitchFamily="34" charset="-120"/>
+              </a:rPr>
+              <a:t>The monsoon blows as follows:</a:t>
+            </a:r>
+            <a:endParaRPr lang="en-US" sz="3600" dirty="0"/>
+          </a:p>
+          <a:p>
+            <a:pPr algn="l" indent="0" marL="0">
+              <a:spcAft>
+                <a:spcPts val="800"/>
+              </a:spcAft>
+              <a:buNone/>
+            </a:pPr>
+            <a:r>
+              <a:rPr lang="en-US" sz="3600" b="1" dirty="0">
+                <a:solidFill>
+                  <a:srgbClr val="111111"/>
+                </a:solidFill>
+                <a:latin typeface="Times New Roman" pitchFamily="34" charset="0"/>
+                <a:ea typeface="Times New Roman" pitchFamily="34" charset="-122"/>
+                <a:cs typeface="Times New Roman" pitchFamily="34" charset="-120"/>
+              </a:rPr>
+              <a:t>Summer monsoon: </a:t>
+            </a:r>
+            <a:pPr algn="l" indent="0" marL="0">
+              <a:spcAft>
+                <a:spcPts val="800"/>
+              </a:spcAft>
+              <a:buNone/>
+            </a:pPr>
+            <a:r>
+              <a:rPr lang="en-US" sz="3600" dirty="0">
+                <a:solidFill>
+                  <a:srgbClr val="111111"/>
+                </a:solidFill>
+                <a:latin typeface="Times New Roman" pitchFamily="34" charset="0"/>
+                <a:ea typeface="Times New Roman" pitchFamily="34" charset="-122"/>
+                <a:cs typeface="Times New Roman" pitchFamily="34" charset="-120"/>
+              </a:rPr>
+              <a:t>The land is hotter than the sea, so moist wind blows from the sea to the land and brings heavy rain.</a:t>
+            </a:r>
+            <a:endParaRPr lang="en-US" sz="3600" dirty="0"/>
           </a:p>
         </p:txBody>
       </p:sp>
       <p:pic>
         <p:nvPicPr>
-          <p:cNvPr id="3" name="Image 0" descr="/home/claude/f4/img/minesec_sheet.png">    </p:cNvPr>
+          <p:cNvPr id="5" name="Image 0" descr="/home/claude/f4/img/v2/monsoon_big.png">    </p:cNvPr>
           <p:cNvPicPr>
             <a:picLocks noChangeAspect="1"/>
           </p:cNvPicPr>
@@ -12753,8 +13422,8 @@
         </p:blipFill>
         <p:spPr>
           <a:xfrm>
-            <a:off x="0" y="658368"/>
-            <a:ext cx="5120640" cy="5833872"/>
+            <a:off x="5349240" y="2253310"/>
+            <a:ext cx="6659575" cy="3329788"/>
           </a:xfrm>
           <a:prstGeom prst="rect">
             <a:avLst/>
@@ -12763,14 +13432,14 @@
       </p:pic>
       <p:sp>
         <p:nvSpPr>
-          <p:cNvPr id="4" name="Text 1"/>
+          <p:cNvPr id="6" name="Text 3"/>
           <p:cNvSpPr/>
           <p:nvPr/>
         </p:nvSpPr>
         <p:spPr>
           <a:xfrm>
-            <a:off x="5349240" y="1005840"/>
-            <a:ext cx="6522415" cy="731520"/>
+            <a:off x="5349240" y="6089904"/>
+            <a:ext cx="6659575" cy="347472"/>
           </a:xfrm>
           <a:prstGeom prst="rect">
             <a:avLst/>
@@ -12779,68 +13448,24 @@
           <a:ln/>
         </p:spPr>
         <p:txBody>
-          <a:bodyPr wrap="square" lIns="0" tIns="0" rIns="0" bIns="0" rtlCol="0" anchor="ctr">
-            <a:normAutofit/>
-          </a:bodyPr>
+          <a:bodyPr wrap="square" lIns="0" tIns="0" rIns="0" bIns="0" rtlCol="0" anchor="ctr"/>
           <a:lstStyle/>
           <a:p>
             <a:pPr algn="ctr" indent="0" marL="0">
               <a:buNone/>
             </a:pPr>
             <a:r>
-              <a:rPr lang="en-US" sz="3600" b="1" dirty="0">
-                <a:solidFill>
-                  <a:srgbClr val="990011"/>
+              <a:rPr lang="en-US" sz="1600" i="1" dirty="0">
+                <a:solidFill>
+                  <a:srgbClr val="555555"/>
                 </a:solidFill>
                 <a:latin typeface="Times New Roman" pitchFamily="34" charset="0"/>
                 <a:ea typeface="Times New Roman" pitchFamily="34" charset="-122"/>
                 <a:cs typeface="Times New Roman" pitchFamily="34" charset="-120"/>
               </a:rPr>
-              <a:t>Evaluation 2</a:t>
-            </a:r>
-            <a:endParaRPr lang="en-US" sz="3600" dirty="0"/>
-          </a:p>
-        </p:txBody>
-      </p:sp>
-      <p:sp>
-        <p:nvSpPr>
-          <p:cNvPr id="5" name="Text 2"/>
-          <p:cNvSpPr/>
-          <p:nvPr/>
-        </p:nvSpPr>
-        <p:spPr>
-          <a:xfrm>
-            <a:off x="5349240" y="1783080"/>
-            <a:ext cx="6522415" cy="4663440"/>
-          </a:xfrm>
-          <a:prstGeom prst="rect">
-            <a:avLst/>
-          </a:prstGeom>
-          <a:noFill/>
-          <a:ln/>
-        </p:spPr>
-        <p:txBody>
-          <a:bodyPr wrap="square" lIns="0" tIns="0" rIns="0" bIns="0" rtlCol="0" anchor="t"/>
-          <a:lstStyle/>
-          <a:p>
-            <a:pPr algn="l" indent="0" marL="0">
-              <a:spcAft>
-                <a:spcPts val="800"/>
-              </a:spcAft>
-              <a:buNone/>
-            </a:pPr>
-            <a:r>
-              <a:rPr lang="en-US" sz="4000" dirty="0">
-                <a:solidFill>
-                  <a:srgbClr val="111111"/>
-                </a:solidFill>
-                <a:latin typeface="Times New Roman" pitchFamily="34" charset="0"/>
-                <a:ea typeface="Times New Roman" pitchFamily="34" charset="-122"/>
-                <a:cs typeface="Times New Roman" pitchFamily="34" charset="-120"/>
-              </a:rPr>
-              <a:t>Which wind blows down the slopes at night?</a:t>
-            </a:r>
-            <a:endParaRPr lang="en-US" sz="4000" dirty="0"/>
+              <a:t>Illustration: the monsoon</a:t>
+            </a:r>
+            <a:endParaRPr lang="en-US" sz="1600" dirty="0"/>
           </a:p>
         </p:txBody>
       </p:sp>
@@ -12950,7 +13575,7 @@
                 <a:ea typeface="Calibri" pitchFamily="34" charset="-122"/>
                 <a:cs typeface="Calibri" pitchFamily="34" charset="-120"/>
               </a:rPr>
-              <a:t>FORMATIVE EVALUATION</a:t>
+              <a:t>BOARD SUMMARY</a:t>
             </a:r>
             <a:endParaRPr lang="en-US" sz="1400" dirty="0"/>
           </a:p>
@@ -12973,7 +13598,7 @@
         <p:spPr>
           <a:xfrm>
             <a:off x="0" y="658368"/>
-            <a:ext cx="5120640" cy="5833872"/>
+            <a:ext cx="3840480" cy="5833872"/>
           </a:xfrm>
           <a:prstGeom prst="rect">
             <a:avLst/>
@@ -12988,8 +13613,8 @@
         </p:nvSpPr>
         <p:spPr>
           <a:xfrm>
-            <a:off x="5349240" y="1005840"/>
-            <a:ext cx="6522415" cy="731520"/>
+            <a:off x="4069080" y="1005840"/>
+            <a:ext cx="7802575" cy="731520"/>
           </a:xfrm>
           <a:prstGeom prst="rect">
             <a:avLst/>
@@ -13015,7 +13640,7 @@
                 <a:ea typeface="Times New Roman" pitchFamily="34" charset="-122"/>
                 <a:cs typeface="Times New Roman" pitchFamily="34" charset="-120"/>
               </a:rPr>
-              <a:t>Expected Answer</a:t>
+              <a:t>3. The Monsoon</a:t>
             </a:r>
             <a:endParaRPr lang="en-US" sz="3600" dirty="0"/>
           </a:p>
@@ -13029,8 +13654,8 @@
         </p:nvSpPr>
         <p:spPr>
           <a:xfrm>
-            <a:off x="5349240" y="1783080"/>
-            <a:ext cx="6522415" cy="4663440"/>
+            <a:off x="4069080" y="1783080"/>
+            <a:ext cx="7802575" cy="4663440"/>
           </a:xfrm>
           <a:prstGeom prst="rect">
             <a:avLst/>
@@ -13049,7 +13674,7 @@
               <a:buNone/>
             </a:pPr>
             <a:r>
-              <a:rPr lang="en-US" sz="4000" dirty="0">
+              <a:rPr lang="en-US" sz="4000" b="1" dirty="0">
                 <a:solidFill>
                   <a:srgbClr val="111111"/>
                 </a:solidFill>
@@ -13057,7 +13682,61 @@
                 <a:ea typeface="Times New Roman" pitchFamily="34" charset="-122"/>
                 <a:cs typeface="Times New Roman" pitchFamily="34" charset="-120"/>
               </a:rPr>
-              <a:t>The mountain breeze.</a:t>
+              <a:t>Winter monsoon: </a:t>
+            </a:r>
+            <a:pPr algn="l" indent="0" marL="0">
+              <a:spcAft>
+                <a:spcPts val="800"/>
+              </a:spcAft>
+              <a:buNone/>
+            </a:pPr>
+            <a:r>
+              <a:rPr lang="en-US" sz="4000" dirty="0">
+                <a:solidFill>
+                  <a:srgbClr val="111111"/>
+                </a:solidFill>
+                <a:latin typeface="Times New Roman" pitchFamily="34" charset="0"/>
+                <a:ea typeface="Times New Roman" pitchFamily="34" charset="-122"/>
+                <a:cs typeface="Times New Roman" pitchFamily="34" charset="-120"/>
+              </a:rPr>
+              <a:t>The land is colder than the sea, so dry wind blows from the land to the sea.</a:t>
+            </a:r>
+            <a:endParaRPr lang="en-US" sz="4000" dirty="0"/>
+          </a:p>
+          <a:p>
+            <a:pPr algn="l" indent="0" marL="0">
+              <a:spcAft>
+                <a:spcPts val="800"/>
+              </a:spcAft>
+              <a:buNone/>
+            </a:pPr>
+            <a:r>
+              <a:rPr lang="en-US" sz="4000" b="1" dirty="0">
+                <a:solidFill>
+                  <a:srgbClr val="111111"/>
+                </a:solidFill>
+                <a:latin typeface="Times New Roman" pitchFamily="34" charset="0"/>
+                <a:ea typeface="Times New Roman" pitchFamily="34" charset="-122"/>
+                <a:cs typeface="Times New Roman" pitchFamily="34" charset="-120"/>
+              </a:rPr>
+              <a:t>Examples: </a:t>
+            </a:r>
+            <a:pPr algn="l" indent="0" marL="0">
+              <a:spcAft>
+                <a:spcPts val="800"/>
+              </a:spcAft>
+              <a:buNone/>
+            </a:pPr>
+            <a:r>
+              <a:rPr lang="en-US" sz="4000" dirty="0">
+                <a:solidFill>
+                  <a:srgbClr val="111111"/>
+                </a:solidFill>
+                <a:latin typeface="Times New Roman" pitchFamily="34" charset="0"/>
+                <a:ea typeface="Times New Roman" pitchFamily="34" charset="-122"/>
+                <a:cs typeface="Times New Roman" pitchFamily="34" charset="-120"/>
+              </a:rPr>
+              <a:t>The monsoon is strongest in India and South-East Asia, and West Africa has a south-west monsoon in the rainy season.</a:t>
             </a:r>
             <a:endParaRPr lang="en-US" sz="4000" dirty="0"/>
           </a:p>
@@ -13169,7 +13848,7 @@
                 <a:ea typeface="Calibri" pitchFamily="34" charset="-122"/>
                 <a:cs typeface="Calibri" pitchFamily="34" charset="-120"/>
               </a:rPr>
-              <a:t>REMEDIATION</a:t>
+              <a:t>FORMATIVE EVALUATION</a:t>
             </a:r>
             <a:endParaRPr lang="en-US" sz="1400" dirty="0"/>
           </a:p>
@@ -13234,7 +13913,7 @@
                 <a:ea typeface="Times New Roman" pitchFamily="34" charset="-122"/>
                 <a:cs typeface="Times New Roman" pitchFamily="34" charset="-120"/>
               </a:rPr>
-              <a:t>Remediation</a:t>
+              <a:t>Evaluation 1</a:t>
             </a:r>
             <a:endParaRPr lang="en-US" sz="3600" dirty="0"/>
           </a:p>
@@ -13268,7 +13947,7 @@
               <a:buNone/>
             </a:pPr>
             <a:r>
-              <a:rPr lang="en-US" sz="4000" b="1" dirty="0">
+              <a:rPr lang="en-US" sz="4000" dirty="0">
                 <a:solidFill>
                   <a:srgbClr val="111111"/>
                 </a:solidFill>
@@ -13276,51 +13955,7 @@
                 <a:ea typeface="Times New Roman" pitchFamily="34" charset="-122"/>
                 <a:cs typeface="Times New Roman" pitchFamily="34" charset="-120"/>
               </a:rPr>
-              <a:t>Fill in the blanks:</a:t>
-            </a:r>
-            <a:endParaRPr lang="en-US" sz="4000" dirty="0"/>
-          </a:p>
-          <a:p>
-            <a:pPr algn="l" marL="342900" indent="-342900">
-              <a:spcAft>
-                <a:spcPts val="800"/>
-              </a:spcAft>
-              <a:buSzPct val="100000"/>
-              <a:buFont typeface="+mj-lt"/>
-              <a:buAutoNum type="arabicPeriod" startAt="1"/>
-            </a:pPr>
-            <a:r>
-              <a:rPr lang="en-US" sz="4000" dirty="0">
-                <a:solidFill>
-                  <a:srgbClr val="111111"/>
-                </a:solidFill>
-                <a:latin typeface="Times New Roman" pitchFamily="34" charset="0"/>
-                <a:ea typeface="Times New Roman" pitchFamily="34" charset="-122"/>
-                <a:cs typeface="Times New Roman" pitchFamily="34" charset="-120"/>
-              </a:rPr>
-              <a:t>By day, the ______ breeze blows from the sea.</a:t>
-            </a:r>
-            <a:endParaRPr lang="en-US" sz="4000" dirty="0"/>
-          </a:p>
-          <a:p>
-            <a:pPr algn="l" marL="342900" indent="-342900">
-              <a:spcAft>
-                <a:spcPts val="800"/>
-              </a:spcAft>
-              <a:buSzPct val="100000"/>
-              <a:buFont typeface="+mj-lt"/>
-              <a:buAutoNum type="arabicPeriod" startAt="1"/>
-            </a:pPr>
-            <a:r>
-              <a:rPr lang="en-US" sz="4000" dirty="0">
-                <a:solidFill>
-                  <a:srgbClr val="111111"/>
-                </a:solidFill>
-                <a:latin typeface="Times New Roman" pitchFamily="34" charset="0"/>
-                <a:ea typeface="Times New Roman" pitchFamily="34" charset="-122"/>
-                <a:cs typeface="Times New Roman" pitchFamily="34" charset="-120"/>
-              </a:rPr>
-              <a:t>At night, the ______ breeze blows from the land.</a:t>
+              <a:t>Why does the sea breeze blow by day?</a:t>
             </a:r>
             <a:endParaRPr lang="en-US" sz="4000" dirty="0"/>
           </a:p>
@@ -13432,7 +14067,7 @@
                 <a:ea typeface="Calibri" pitchFamily="34" charset="-122"/>
                 <a:cs typeface="Calibri" pitchFamily="34" charset="-120"/>
               </a:rPr>
-              <a:t>REMEDIATION</a:t>
+              <a:t>FORMATIVE EVALUATION</a:t>
             </a:r>
             <a:endParaRPr lang="en-US" sz="1400" dirty="0"/>
           </a:p>
@@ -13497,7 +14132,7 @@
                 <a:ea typeface="Times New Roman" pitchFamily="34" charset="-122"/>
                 <a:cs typeface="Times New Roman" pitchFamily="34" charset="-120"/>
               </a:rPr>
-              <a:t>Remediation (continued)</a:t>
+              <a:t>Expected Answer</a:t>
             </a:r>
             <a:endParaRPr lang="en-US" sz="3600" dirty="0"/>
           </a:p>
@@ -13524,13 +14159,11 @@
           <a:bodyPr wrap="square" lIns="0" tIns="0" rIns="0" bIns="0" rtlCol="0" anchor="t"/>
           <a:lstStyle/>
           <a:p>
-            <a:pPr algn="l" marL="342900" indent="-342900">
+            <a:pPr algn="l" indent="0" marL="0">
               <a:spcAft>
                 <a:spcPts val="800"/>
               </a:spcAft>
-              <a:buSzPct val="100000"/>
-              <a:buFont typeface="+mj-lt"/>
-              <a:buAutoNum type="arabicPeriod" startAt="1"/>
+              <a:buNone/>
             </a:pPr>
             <a:r>
               <a:rPr lang="en-US" sz="4000" dirty="0">
@@ -13541,7 +14174,7 @@
                 <a:ea typeface="Times New Roman" pitchFamily="34" charset="-122"/>
                 <a:cs typeface="Times New Roman" pitchFamily="34" charset="-120"/>
               </a:rPr>
-              <a:t>The wind that blows up the slopes by day is the ______ breeze.</a:t>
+              <a:t>The land heats faster than the sea.</a:t>
             </a:r>
             <a:endParaRPr lang="en-US" sz="4000" dirty="0"/>
           </a:p>
@@ -13653,7 +14286,7 @@
                 <a:ea typeface="Calibri" pitchFamily="34" charset="-122"/>
                 <a:cs typeface="Calibri" pitchFamily="34" charset="-120"/>
               </a:rPr>
-              <a:t>HOMEWORK</a:t>
+              <a:t>FORMATIVE EVALUATION</a:t>
             </a:r>
             <a:endParaRPr lang="en-US" sz="1400" dirty="0"/>
           </a:p>
@@ -13718,7 +14351,7 @@
                 <a:ea typeface="Times New Roman" pitchFamily="34" charset="-122"/>
                 <a:cs typeface="Times New Roman" pitchFamily="34" charset="-120"/>
               </a:rPr>
-              <a:t>Homework</a:t>
+              <a:t>Evaluation 2</a:t>
             </a:r>
             <a:endParaRPr lang="en-US" sz="3600" dirty="0"/>
           </a:p>
@@ -13760,7 +14393,7 @@
                 <a:ea typeface="Times New Roman" pitchFamily="34" charset="-122"/>
                 <a:cs typeface="Times New Roman" pitchFamily="34" charset="-120"/>
               </a:rPr>
-              <a:t>Compare the temperature of Garoua with that of Ngaoundéré (ask an adult who has travelled there). Write one sentence to say which town is cooler and one possible reason.</a:t>
+              <a:t>Which wind blows down the slopes at night?</a:t>
             </a:r>
             <a:endParaRPr lang="en-US" sz="4000" dirty="0"/>
           </a:p>
@@ -13872,7 +14505,7 @@
                 <a:ea typeface="Calibri" pitchFamily="34" charset="-122"/>
                 <a:cs typeface="Calibri" pitchFamily="34" charset="-120"/>
               </a:rPr>
-              <a:t>NEXT LESSON</a:t>
+              <a:t>FORMATIVE EVALUATION</a:t>
             </a:r>
             <a:endParaRPr lang="en-US" sz="1400" dirty="0"/>
           </a:p>
@@ -13937,7 +14570,7 @@
                 <a:ea typeface="Times New Roman" pitchFamily="34" charset="-122"/>
                 <a:cs typeface="Times New Roman" pitchFamily="34" charset="-120"/>
               </a:rPr>
-              <a:t>Next Lesson</a:t>
+              <a:t>Expected Answer</a:t>
             </a:r>
             <a:endParaRPr lang="en-US" sz="3600" dirty="0"/>
           </a:p>
@@ -13961,17 +14594,17 @@
           <a:ln/>
         </p:spPr>
         <p:txBody>
-          <a:bodyPr wrap="square" lIns="0" tIns="0" rIns="0" bIns="0" rtlCol="0" anchor="ctr"/>
-          <a:lstStyle/>
-          <a:p>
-            <a:pPr algn="ctr" indent="0" marL="0">
+          <a:bodyPr wrap="square" lIns="0" tIns="0" rIns="0" bIns="0" rtlCol="0" anchor="t"/>
+          <a:lstStyle/>
+          <a:p>
+            <a:pPr algn="l" indent="0" marL="0">
               <a:spcAft>
                 <a:spcPts val="800"/>
               </a:spcAft>
               <a:buNone/>
             </a:pPr>
             <a:r>
-              <a:rPr lang="en-US" sz="4000" b="1" dirty="0">
+              <a:rPr lang="en-US" sz="4000" dirty="0">
                 <a:solidFill>
                   <a:srgbClr val="111111"/>
                 </a:solidFill>
@@ -13979,27 +14612,7 @@
                 <a:ea typeface="Times New Roman" pitchFamily="34" charset="-122"/>
                 <a:cs typeface="Times New Roman" pitchFamily="34" charset="-120"/>
               </a:rPr>
-              <a:t>Our next lesson will be on:</a:t>
-            </a:r>
-            <a:endParaRPr lang="en-US" sz="4000" dirty="0"/>
-          </a:p>
-          <a:p>
-            <a:pPr algn="ctr" indent="0" marL="0">
-              <a:spcAft>
-                <a:spcPts val="800"/>
-              </a:spcAft>
-              <a:buNone/>
-            </a:pPr>
-            <a:r>
-              <a:rPr lang="en-US" sz="4000" b="1" dirty="0">
-                <a:solidFill>
-                  <a:srgbClr val="990011"/>
-                </a:solidFill>
-                <a:latin typeface="Times New Roman" pitchFamily="34" charset="0"/>
-                <a:ea typeface="Times New Roman" pitchFamily="34" charset="-122"/>
-                <a:cs typeface="Times New Roman" pitchFamily="34" charset="-120"/>
-              </a:rPr>
-              <a:t>Lesson 38: Factors of Temperature</a:t>
+              <a:t>The mountain breeze.</a:t>
             </a:r>
             <a:endParaRPr lang="en-US" sz="4000" dirty="0"/>
           </a:p>
@@ -14350,6 +14963,948 @@
                 <a:ea typeface="Calibri" pitchFamily="34" charset="-122"/>
                 <a:cs typeface="Calibri" pitchFamily="34" charset="-120"/>
               </a:rPr>
+              <a:t>REMEDIATION</a:t>
+            </a:r>
+            <a:endParaRPr lang="en-US" sz="1400" dirty="0"/>
+          </a:p>
+        </p:txBody>
+      </p:sp>
+      <p:pic>
+        <p:nvPicPr>
+          <p:cNvPr id="3" name="Image 0" descr="/home/claude/f4/img/minesec_sheet.png">    </p:cNvPr>
+          <p:cNvPicPr>
+            <a:picLocks noChangeAspect="1"/>
+          </p:cNvPicPr>
+          <p:nvPr/>
+        </p:nvPicPr>
+        <p:blipFill>
+          <a:blip r:embed="rId1"/>
+          <a:stretch>
+            <a:fillRect/>
+          </a:stretch>
+        </p:blipFill>
+        <p:spPr>
+          <a:xfrm>
+            <a:off x="0" y="658368"/>
+            <a:ext cx="5120640" cy="5833872"/>
+          </a:xfrm>
+          <a:prstGeom prst="rect">
+            <a:avLst/>
+          </a:prstGeom>
+        </p:spPr>
+      </p:pic>
+      <p:sp>
+        <p:nvSpPr>
+          <p:cNvPr id="4" name="Text 1"/>
+          <p:cNvSpPr/>
+          <p:nvPr/>
+        </p:nvSpPr>
+        <p:spPr>
+          <a:xfrm>
+            <a:off x="5349240" y="1005840"/>
+            <a:ext cx="6522415" cy="731520"/>
+          </a:xfrm>
+          <a:prstGeom prst="rect">
+            <a:avLst/>
+          </a:prstGeom>
+          <a:noFill/>
+          <a:ln/>
+        </p:spPr>
+        <p:txBody>
+          <a:bodyPr wrap="square" lIns="0" tIns="0" rIns="0" bIns="0" rtlCol="0" anchor="ctr">
+            <a:normAutofit/>
+          </a:bodyPr>
+          <a:lstStyle/>
+          <a:p>
+            <a:pPr algn="ctr" indent="0" marL="0">
+              <a:buNone/>
+            </a:pPr>
+            <a:r>
+              <a:rPr lang="en-US" sz="3600" b="1" dirty="0">
+                <a:solidFill>
+                  <a:srgbClr val="990011"/>
+                </a:solidFill>
+                <a:latin typeface="Times New Roman" pitchFamily="34" charset="0"/>
+                <a:ea typeface="Times New Roman" pitchFamily="34" charset="-122"/>
+                <a:cs typeface="Times New Roman" pitchFamily="34" charset="-120"/>
+              </a:rPr>
+              <a:t>Remediation</a:t>
+            </a:r>
+            <a:endParaRPr lang="en-US" sz="3600" dirty="0"/>
+          </a:p>
+        </p:txBody>
+      </p:sp>
+      <p:sp>
+        <p:nvSpPr>
+          <p:cNvPr id="5" name="Text 2"/>
+          <p:cNvSpPr/>
+          <p:nvPr/>
+        </p:nvSpPr>
+        <p:spPr>
+          <a:xfrm>
+            <a:off x="5349240" y="1783080"/>
+            <a:ext cx="6522415" cy="4663440"/>
+          </a:xfrm>
+          <a:prstGeom prst="rect">
+            <a:avLst/>
+          </a:prstGeom>
+          <a:noFill/>
+          <a:ln/>
+        </p:spPr>
+        <p:txBody>
+          <a:bodyPr wrap="square" lIns="0" tIns="0" rIns="0" bIns="0" rtlCol="0" anchor="t"/>
+          <a:lstStyle/>
+          <a:p>
+            <a:pPr algn="l" indent="0" marL="0">
+              <a:spcAft>
+                <a:spcPts val="800"/>
+              </a:spcAft>
+              <a:buNone/>
+            </a:pPr>
+            <a:r>
+              <a:rPr lang="en-US" sz="4000" b="1" dirty="0">
+                <a:solidFill>
+                  <a:srgbClr val="111111"/>
+                </a:solidFill>
+                <a:latin typeface="Times New Roman" pitchFamily="34" charset="0"/>
+                <a:ea typeface="Times New Roman" pitchFamily="34" charset="-122"/>
+                <a:cs typeface="Times New Roman" pitchFamily="34" charset="-120"/>
+              </a:rPr>
+              <a:t>Fill in the blanks:</a:t>
+            </a:r>
+            <a:endParaRPr lang="en-US" sz="4000" dirty="0"/>
+          </a:p>
+          <a:p>
+            <a:pPr algn="l" marL="342900" indent="-342900">
+              <a:spcAft>
+                <a:spcPts val="800"/>
+              </a:spcAft>
+              <a:buSzPct val="100000"/>
+              <a:buFont typeface="+mj-lt"/>
+              <a:buAutoNum type="arabicPeriod" startAt="1"/>
+            </a:pPr>
+            <a:r>
+              <a:rPr lang="en-US" sz="4000" dirty="0">
+                <a:solidFill>
+                  <a:srgbClr val="111111"/>
+                </a:solidFill>
+                <a:latin typeface="Times New Roman" pitchFamily="34" charset="0"/>
+                <a:ea typeface="Times New Roman" pitchFamily="34" charset="-122"/>
+                <a:cs typeface="Times New Roman" pitchFamily="34" charset="-120"/>
+              </a:rPr>
+              <a:t>By day, the ______ breeze blows from the sea.</a:t>
+            </a:r>
+            <a:endParaRPr lang="en-US" sz="4000" dirty="0"/>
+          </a:p>
+          <a:p>
+            <a:pPr algn="l" marL="342900" indent="-342900">
+              <a:spcAft>
+                <a:spcPts val="800"/>
+              </a:spcAft>
+              <a:buSzPct val="100000"/>
+              <a:buFont typeface="+mj-lt"/>
+              <a:buAutoNum type="arabicPeriod" startAt="1"/>
+            </a:pPr>
+            <a:r>
+              <a:rPr lang="en-US" sz="4000" dirty="0">
+                <a:solidFill>
+                  <a:srgbClr val="111111"/>
+                </a:solidFill>
+                <a:latin typeface="Times New Roman" pitchFamily="34" charset="0"/>
+                <a:ea typeface="Times New Roman" pitchFamily="34" charset="-122"/>
+                <a:cs typeface="Times New Roman" pitchFamily="34" charset="-120"/>
+              </a:rPr>
+              <a:t>At night, the ______ breeze blows from the land.</a:t>
+            </a:r>
+            <a:endParaRPr lang="en-US" sz="4000" dirty="0"/>
+          </a:p>
+        </p:txBody>
+      </p:sp>
+      <p:sp>
+        <p:nvSpPr>
+          <p:cNvPr id="25" name="Slide Number Placeholder 0"/>
+          <p:cNvSpPr>
+            <a:spLocks noGrp="1"/>
+          </p:cNvSpPr>
+          <p:nvPr>
+            <p:ph type="sldNum" sz="quarter" idx="4294967295"/>
+          </p:nvPr>
+        </p:nvSpPr>
+        <p:spPr>
+          <a:xfrm>
+            <a:off x="27432" y="91440"/>
+            <a:ext cx="585216" cy="475488"/>
+          </a:xfrm>
+          <a:prstGeom prst="rect">
+            <a:avLst/>
+          </a:prstGeom>
+          <a:extLst>
+            <a:ext uri="{C572A759-6A51-4108-AA02-DFA0A04FC94B}">
+              <ma14:wrappingTextBoxFlag xmlns:ma14="http://schemas.microsoft.com/office/mac/drawingml/2011/main" val="0"/>
+            </a:ext>
+          </a:extLst>
+        </p:spPr>
+        <p:txBody>
+          <a:bodyPr/>
+          <a:lstStyle>
+            <a:lvl1pPr>
+              <a:defRPr sz="2000">
+                <a:solidFill>
+                  <a:srgbClr val="FFFFFF"/>
+                </a:solidFill>
+                <a:latin typeface="Calibri"/>
+                <a:ea typeface="Calibri"/>
+                <a:cs typeface="Calibri"/>
+              </a:defRPr>
+            </a:lvl1pPr>
+          </a:lstStyle>
+          <a:p>
+            <a:pPr algn="ctr"/>
+            <a:fld id="{F7021451-1387-4CA6-816F-3879F97B5CBC}" type="slidenum">
+              <a:rPr b="1" lang="en-US"/>
+              <a:t>40</a:t>
+            </a:fld>
+            <a:endParaRPr lang="en-US"/>
+          </a:p>
+        </p:txBody>
+      </p:sp>
+    </p:spTree>
+  </p:cSld>
+  <p:clrMapOvr>
+    <a:masterClrMapping/>
+  </p:clrMapOvr>
+</p:sld>
+</file>
+
+<file path=ppt/slides/slide41.xml><?xml version="1.0" encoding="utf-8"?>
+<p:sld xmlns:a="http://schemas.openxmlformats.org/drawingml/2006/main" xmlns:r="http://schemas.openxmlformats.org/officeDocument/2006/relationships" xmlns:p="http://schemas.openxmlformats.org/presentationml/2006/main">
+  <p:cSld name="Slide 41">
+    <p:spTree>
+      <p:nvGrpSpPr>
+        <p:cNvPr id="1" name=""/>
+        <p:cNvGrpSpPr/>
+        <p:nvPr/>
+      </p:nvGrpSpPr>
+      <p:grpSpPr>
+        <a:xfrm>
+          <a:off x="0" y="0"/>
+          <a:ext cx="0" cy="0"/>
+          <a:chOff x="0" y="0"/>
+          <a:chExt cx="0" cy="0"/>
+        </a:xfrm>
+      </p:grpSpPr>
+      <p:sp>
+        <p:nvSpPr>
+          <p:cNvPr id="2" name="Text 0"/>
+          <p:cNvSpPr/>
+          <p:nvPr/>
+        </p:nvSpPr>
+        <p:spPr>
+          <a:xfrm>
+            <a:off x="457200" y="713232"/>
+            <a:ext cx="11368735" cy="274320"/>
+          </a:xfrm>
+          <a:prstGeom prst="rect">
+            <a:avLst/>
+          </a:prstGeom>
+          <a:noFill/>
+          <a:ln/>
+        </p:spPr>
+        <p:txBody>
+          <a:bodyPr wrap="square" lIns="0" tIns="0" rIns="0" bIns="0" rtlCol="0" anchor="ctr"/>
+          <a:lstStyle/>
+          <a:p>
+            <a:pPr algn="r" indent="0" marL="0">
+              <a:buNone/>
+            </a:pPr>
+            <a:r>
+              <a:rPr lang="en-US" sz="1400" b="1" dirty="0">
+                <a:solidFill>
+                  <a:srgbClr val="1C3F6E"/>
+                </a:solidFill>
+                <a:latin typeface="Calibri" pitchFamily="34" charset="0"/>
+                <a:ea typeface="Calibri" pitchFamily="34" charset="-122"/>
+                <a:cs typeface="Calibri" pitchFamily="34" charset="-120"/>
+              </a:rPr>
+              <a:t>REMEDIATION</a:t>
+            </a:r>
+            <a:endParaRPr lang="en-US" sz="1400" dirty="0"/>
+          </a:p>
+        </p:txBody>
+      </p:sp>
+      <p:pic>
+        <p:nvPicPr>
+          <p:cNvPr id="3" name="Image 0" descr="/home/claude/f4/img/minesec_sheet.png">    </p:cNvPr>
+          <p:cNvPicPr>
+            <a:picLocks noChangeAspect="1"/>
+          </p:cNvPicPr>
+          <p:nvPr/>
+        </p:nvPicPr>
+        <p:blipFill>
+          <a:blip r:embed="rId1"/>
+          <a:stretch>
+            <a:fillRect/>
+          </a:stretch>
+        </p:blipFill>
+        <p:spPr>
+          <a:xfrm>
+            <a:off x="0" y="658368"/>
+            <a:ext cx="5120640" cy="5833872"/>
+          </a:xfrm>
+          <a:prstGeom prst="rect">
+            <a:avLst/>
+          </a:prstGeom>
+        </p:spPr>
+      </p:pic>
+      <p:sp>
+        <p:nvSpPr>
+          <p:cNvPr id="4" name="Text 1"/>
+          <p:cNvSpPr/>
+          <p:nvPr/>
+        </p:nvSpPr>
+        <p:spPr>
+          <a:xfrm>
+            <a:off x="5349240" y="1005840"/>
+            <a:ext cx="6522415" cy="731520"/>
+          </a:xfrm>
+          <a:prstGeom prst="rect">
+            <a:avLst/>
+          </a:prstGeom>
+          <a:noFill/>
+          <a:ln/>
+        </p:spPr>
+        <p:txBody>
+          <a:bodyPr wrap="square" lIns="0" tIns="0" rIns="0" bIns="0" rtlCol="0" anchor="ctr">
+            <a:normAutofit/>
+          </a:bodyPr>
+          <a:lstStyle/>
+          <a:p>
+            <a:pPr algn="ctr" indent="0" marL="0">
+              <a:buNone/>
+            </a:pPr>
+            <a:r>
+              <a:rPr lang="en-US" sz="3600" b="1" dirty="0">
+                <a:solidFill>
+                  <a:srgbClr val="990011"/>
+                </a:solidFill>
+                <a:latin typeface="Times New Roman" pitchFamily="34" charset="0"/>
+                <a:ea typeface="Times New Roman" pitchFamily="34" charset="-122"/>
+                <a:cs typeface="Times New Roman" pitchFamily="34" charset="-120"/>
+              </a:rPr>
+              <a:t>Remediation (continued)</a:t>
+            </a:r>
+            <a:endParaRPr lang="en-US" sz="3600" dirty="0"/>
+          </a:p>
+        </p:txBody>
+      </p:sp>
+      <p:sp>
+        <p:nvSpPr>
+          <p:cNvPr id="5" name="Text 2"/>
+          <p:cNvSpPr/>
+          <p:nvPr/>
+        </p:nvSpPr>
+        <p:spPr>
+          <a:xfrm>
+            <a:off x="5349240" y="1783080"/>
+            <a:ext cx="6522415" cy="4663440"/>
+          </a:xfrm>
+          <a:prstGeom prst="rect">
+            <a:avLst/>
+          </a:prstGeom>
+          <a:noFill/>
+          <a:ln/>
+        </p:spPr>
+        <p:txBody>
+          <a:bodyPr wrap="square" lIns="0" tIns="0" rIns="0" bIns="0" rtlCol="0" anchor="t"/>
+          <a:lstStyle/>
+          <a:p>
+            <a:pPr algn="l" marL="342900" indent="-342900">
+              <a:spcAft>
+                <a:spcPts val="800"/>
+              </a:spcAft>
+              <a:buSzPct val="100000"/>
+              <a:buFont typeface="+mj-lt"/>
+              <a:buAutoNum type="arabicPeriod" startAt="1"/>
+            </a:pPr>
+            <a:r>
+              <a:rPr lang="en-US" sz="4000" dirty="0">
+                <a:solidFill>
+                  <a:srgbClr val="111111"/>
+                </a:solidFill>
+                <a:latin typeface="Times New Roman" pitchFamily="34" charset="0"/>
+                <a:ea typeface="Times New Roman" pitchFamily="34" charset="-122"/>
+                <a:cs typeface="Times New Roman" pitchFamily="34" charset="-120"/>
+              </a:rPr>
+              <a:t>The wind that blows up the slopes by day is the ______ breeze.</a:t>
+            </a:r>
+            <a:endParaRPr lang="en-US" sz="4000" dirty="0"/>
+          </a:p>
+        </p:txBody>
+      </p:sp>
+      <p:sp>
+        <p:nvSpPr>
+          <p:cNvPr id="25" name="Slide Number Placeholder 0"/>
+          <p:cNvSpPr>
+            <a:spLocks noGrp="1"/>
+          </p:cNvSpPr>
+          <p:nvPr>
+            <p:ph type="sldNum" sz="quarter" idx="4294967295"/>
+          </p:nvPr>
+        </p:nvSpPr>
+        <p:spPr>
+          <a:xfrm>
+            <a:off x="27432" y="91440"/>
+            <a:ext cx="585216" cy="475488"/>
+          </a:xfrm>
+          <a:prstGeom prst="rect">
+            <a:avLst/>
+          </a:prstGeom>
+          <a:extLst>
+            <a:ext uri="{C572A759-6A51-4108-AA02-DFA0A04FC94B}">
+              <ma14:wrappingTextBoxFlag xmlns:ma14="http://schemas.microsoft.com/office/mac/drawingml/2011/main" val="0"/>
+            </a:ext>
+          </a:extLst>
+        </p:spPr>
+        <p:txBody>
+          <a:bodyPr/>
+          <a:lstStyle>
+            <a:lvl1pPr>
+              <a:defRPr sz="2000">
+                <a:solidFill>
+                  <a:srgbClr val="FFFFFF"/>
+                </a:solidFill>
+                <a:latin typeface="Calibri"/>
+                <a:ea typeface="Calibri"/>
+                <a:cs typeface="Calibri"/>
+              </a:defRPr>
+            </a:lvl1pPr>
+          </a:lstStyle>
+          <a:p>
+            <a:pPr algn="ctr"/>
+            <a:fld id="{F7021451-1387-4CA6-816F-3879F97B5CBC}" type="slidenum">
+              <a:rPr b="1" lang="en-US"/>
+              <a:t>41</a:t>
+            </a:fld>
+            <a:endParaRPr lang="en-US"/>
+          </a:p>
+        </p:txBody>
+      </p:sp>
+    </p:spTree>
+  </p:cSld>
+  <p:clrMapOvr>
+    <a:masterClrMapping/>
+  </p:clrMapOvr>
+</p:sld>
+</file>
+
+<file path=ppt/slides/slide42.xml><?xml version="1.0" encoding="utf-8"?>
+<p:sld xmlns:a="http://schemas.openxmlformats.org/drawingml/2006/main" xmlns:r="http://schemas.openxmlformats.org/officeDocument/2006/relationships" xmlns:p="http://schemas.openxmlformats.org/presentationml/2006/main">
+  <p:cSld name="Slide 42">
+    <p:spTree>
+      <p:nvGrpSpPr>
+        <p:cNvPr id="1" name=""/>
+        <p:cNvGrpSpPr/>
+        <p:nvPr/>
+      </p:nvGrpSpPr>
+      <p:grpSpPr>
+        <a:xfrm>
+          <a:off x="0" y="0"/>
+          <a:ext cx="0" cy="0"/>
+          <a:chOff x="0" y="0"/>
+          <a:chExt cx="0" cy="0"/>
+        </a:xfrm>
+      </p:grpSpPr>
+      <p:sp>
+        <p:nvSpPr>
+          <p:cNvPr id="2" name="Text 0"/>
+          <p:cNvSpPr/>
+          <p:nvPr/>
+        </p:nvSpPr>
+        <p:spPr>
+          <a:xfrm>
+            <a:off x="457200" y="713232"/>
+            <a:ext cx="11368735" cy="274320"/>
+          </a:xfrm>
+          <a:prstGeom prst="rect">
+            <a:avLst/>
+          </a:prstGeom>
+          <a:noFill/>
+          <a:ln/>
+        </p:spPr>
+        <p:txBody>
+          <a:bodyPr wrap="square" lIns="0" tIns="0" rIns="0" bIns="0" rtlCol="0" anchor="ctr"/>
+          <a:lstStyle/>
+          <a:p>
+            <a:pPr algn="r" indent="0" marL="0">
+              <a:buNone/>
+            </a:pPr>
+            <a:r>
+              <a:rPr lang="en-US" sz="1400" b="1" dirty="0">
+                <a:solidFill>
+                  <a:srgbClr val="1C3F6E"/>
+                </a:solidFill>
+                <a:latin typeface="Calibri" pitchFamily="34" charset="0"/>
+                <a:ea typeface="Calibri" pitchFamily="34" charset="-122"/>
+                <a:cs typeface="Calibri" pitchFamily="34" charset="-120"/>
+              </a:rPr>
+              <a:t>HOMEWORK</a:t>
+            </a:r>
+            <a:endParaRPr lang="en-US" sz="1400" dirty="0"/>
+          </a:p>
+        </p:txBody>
+      </p:sp>
+      <p:pic>
+        <p:nvPicPr>
+          <p:cNvPr id="3" name="Image 0" descr="/home/claude/f4/img/minesec_sheet.png">    </p:cNvPr>
+          <p:cNvPicPr>
+            <a:picLocks noChangeAspect="1"/>
+          </p:cNvPicPr>
+          <p:nvPr/>
+        </p:nvPicPr>
+        <p:blipFill>
+          <a:blip r:embed="rId1"/>
+          <a:stretch>
+            <a:fillRect/>
+          </a:stretch>
+        </p:blipFill>
+        <p:spPr>
+          <a:xfrm>
+            <a:off x="0" y="658368"/>
+            <a:ext cx="5120640" cy="5833872"/>
+          </a:xfrm>
+          <a:prstGeom prst="rect">
+            <a:avLst/>
+          </a:prstGeom>
+        </p:spPr>
+      </p:pic>
+      <p:sp>
+        <p:nvSpPr>
+          <p:cNvPr id="4" name="Text 1"/>
+          <p:cNvSpPr/>
+          <p:nvPr/>
+        </p:nvSpPr>
+        <p:spPr>
+          <a:xfrm>
+            <a:off x="5349240" y="1005840"/>
+            <a:ext cx="6522415" cy="731520"/>
+          </a:xfrm>
+          <a:prstGeom prst="rect">
+            <a:avLst/>
+          </a:prstGeom>
+          <a:noFill/>
+          <a:ln/>
+        </p:spPr>
+        <p:txBody>
+          <a:bodyPr wrap="square" lIns="0" tIns="0" rIns="0" bIns="0" rtlCol="0" anchor="ctr">
+            <a:normAutofit/>
+          </a:bodyPr>
+          <a:lstStyle/>
+          <a:p>
+            <a:pPr algn="ctr" indent="0" marL="0">
+              <a:buNone/>
+            </a:pPr>
+            <a:r>
+              <a:rPr lang="en-US" sz="3600" b="1" dirty="0">
+                <a:solidFill>
+                  <a:srgbClr val="990011"/>
+                </a:solidFill>
+                <a:latin typeface="Times New Roman" pitchFamily="34" charset="0"/>
+                <a:ea typeface="Times New Roman" pitchFamily="34" charset="-122"/>
+                <a:cs typeface="Times New Roman" pitchFamily="34" charset="-120"/>
+              </a:rPr>
+              <a:t>Homework</a:t>
+            </a:r>
+            <a:endParaRPr lang="en-US" sz="3600" dirty="0"/>
+          </a:p>
+        </p:txBody>
+      </p:sp>
+      <p:sp>
+        <p:nvSpPr>
+          <p:cNvPr id="5" name="Text 2"/>
+          <p:cNvSpPr/>
+          <p:nvPr/>
+        </p:nvSpPr>
+        <p:spPr>
+          <a:xfrm>
+            <a:off x="5349240" y="1783080"/>
+            <a:ext cx="6522415" cy="4663440"/>
+          </a:xfrm>
+          <a:prstGeom prst="rect">
+            <a:avLst/>
+          </a:prstGeom>
+          <a:noFill/>
+          <a:ln/>
+        </p:spPr>
+        <p:txBody>
+          <a:bodyPr wrap="square" lIns="0" tIns="0" rIns="0" bIns="0" rtlCol="0" anchor="t"/>
+          <a:lstStyle/>
+          <a:p>
+            <a:pPr algn="l" indent="0" marL="0">
+              <a:spcAft>
+                <a:spcPts val="800"/>
+              </a:spcAft>
+              <a:buNone/>
+            </a:pPr>
+            <a:r>
+              <a:rPr lang="en-US" sz="4000" dirty="0">
+                <a:solidFill>
+                  <a:srgbClr val="111111"/>
+                </a:solidFill>
+                <a:latin typeface="Times New Roman" pitchFamily="34" charset="0"/>
+                <a:ea typeface="Times New Roman" pitchFamily="34" charset="-122"/>
+                <a:cs typeface="Times New Roman" pitchFamily="34" charset="-120"/>
+              </a:rPr>
+              <a:t>Compare the temperature of Garoua with that of Ngaoundéré (ask an adult who has travelled there). Write one sentence to say which town is cooler and one possible reason.</a:t>
+            </a:r>
+            <a:endParaRPr lang="en-US" sz="4000" dirty="0"/>
+          </a:p>
+        </p:txBody>
+      </p:sp>
+      <p:sp>
+        <p:nvSpPr>
+          <p:cNvPr id="25" name="Slide Number Placeholder 0"/>
+          <p:cNvSpPr>
+            <a:spLocks noGrp="1"/>
+          </p:cNvSpPr>
+          <p:nvPr>
+            <p:ph type="sldNum" sz="quarter" idx="4294967295"/>
+          </p:nvPr>
+        </p:nvSpPr>
+        <p:spPr>
+          <a:xfrm>
+            <a:off x="27432" y="91440"/>
+            <a:ext cx="585216" cy="475488"/>
+          </a:xfrm>
+          <a:prstGeom prst="rect">
+            <a:avLst/>
+          </a:prstGeom>
+          <a:extLst>
+            <a:ext uri="{C572A759-6A51-4108-AA02-DFA0A04FC94B}">
+              <ma14:wrappingTextBoxFlag xmlns:ma14="http://schemas.microsoft.com/office/mac/drawingml/2011/main" val="0"/>
+            </a:ext>
+          </a:extLst>
+        </p:spPr>
+        <p:txBody>
+          <a:bodyPr/>
+          <a:lstStyle>
+            <a:lvl1pPr>
+              <a:defRPr sz="2000">
+                <a:solidFill>
+                  <a:srgbClr val="FFFFFF"/>
+                </a:solidFill>
+                <a:latin typeface="Calibri"/>
+                <a:ea typeface="Calibri"/>
+                <a:cs typeface="Calibri"/>
+              </a:defRPr>
+            </a:lvl1pPr>
+          </a:lstStyle>
+          <a:p>
+            <a:pPr algn="ctr"/>
+            <a:fld id="{F7021451-1387-4CA6-816F-3879F97B5CBC}" type="slidenum">
+              <a:rPr b="1" lang="en-US"/>
+              <a:t>42</a:t>
+            </a:fld>
+            <a:endParaRPr lang="en-US"/>
+          </a:p>
+        </p:txBody>
+      </p:sp>
+    </p:spTree>
+  </p:cSld>
+  <p:clrMapOvr>
+    <a:masterClrMapping/>
+  </p:clrMapOvr>
+</p:sld>
+</file>
+
+<file path=ppt/slides/slide43.xml><?xml version="1.0" encoding="utf-8"?>
+<p:sld xmlns:a="http://schemas.openxmlformats.org/drawingml/2006/main" xmlns:r="http://schemas.openxmlformats.org/officeDocument/2006/relationships" xmlns:p="http://schemas.openxmlformats.org/presentationml/2006/main">
+  <p:cSld name="Slide 43">
+    <p:spTree>
+      <p:nvGrpSpPr>
+        <p:cNvPr id="1" name=""/>
+        <p:cNvGrpSpPr/>
+        <p:nvPr/>
+      </p:nvGrpSpPr>
+      <p:grpSpPr>
+        <a:xfrm>
+          <a:off x="0" y="0"/>
+          <a:ext cx="0" cy="0"/>
+          <a:chOff x="0" y="0"/>
+          <a:chExt cx="0" cy="0"/>
+        </a:xfrm>
+      </p:grpSpPr>
+      <p:sp>
+        <p:nvSpPr>
+          <p:cNvPr id="2" name="Text 0"/>
+          <p:cNvSpPr/>
+          <p:nvPr/>
+        </p:nvSpPr>
+        <p:spPr>
+          <a:xfrm>
+            <a:off x="457200" y="713232"/>
+            <a:ext cx="11368735" cy="274320"/>
+          </a:xfrm>
+          <a:prstGeom prst="rect">
+            <a:avLst/>
+          </a:prstGeom>
+          <a:noFill/>
+          <a:ln/>
+        </p:spPr>
+        <p:txBody>
+          <a:bodyPr wrap="square" lIns="0" tIns="0" rIns="0" bIns="0" rtlCol="0" anchor="ctr"/>
+          <a:lstStyle/>
+          <a:p>
+            <a:pPr algn="r" indent="0" marL="0">
+              <a:buNone/>
+            </a:pPr>
+            <a:r>
+              <a:rPr lang="en-US" sz="1400" b="1" dirty="0">
+                <a:solidFill>
+                  <a:srgbClr val="1C3F6E"/>
+                </a:solidFill>
+                <a:latin typeface="Calibri" pitchFamily="34" charset="0"/>
+                <a:ea typeface="Calibri" pitchFamily="34" charset="-122"/>
+                <a:cs typeface="Calibri" pitchFamily="34" charset="-120"/>
+              </a:rPr>
+              <a:t>NEXT LESSON</a:t>
+            </a:r>
+            <a:endParaRPr lang="en-US" sz="1400" dirty="0"/>
+          </a:p>
+        </p:txBody>
+      </p:sp>
+      <p:pic>
+        <p:nvPicPr>
+          <p:cNvPr id="3" name="Image 0" descr="/home/claude/f4/img/minesec_sheet.png">    </p:cNvPr>
+          <p:cNvPicPr>
+            <a:picLocks noChangeAspect="1"/>
+          </p:cNvPicPr>
+          <p:nvPr/>
+        </p:nvPicPr>
+        <p:blipFill>
+          <a:blip r:embed="rId1"/>
+          <a:stretch>
+            <a:fillRect/>
+          </a:stretch>
+        </p:blipFill>
+        <p:spPr>
+          <a:xfrm>
+            <a:off x="0" y="658368"/>
+            <a:ext cx="5120640" cy="5833872"/>
+          </a:xfrm>
+          <a:prstGeom prst="rect">
+            <a:avLst/>
+          </a:prstGeom>
+        </p:spPr>
+      </p:pic>
+      <p:sp>
+        <p:nvSpPr>
+          <p:cNvPr id="4" name="Text 1"/>
+          <p:cNvSpPr/>
+          <p:nvPr/>
+        </p:nvSpPr>
+        <p:spPr>
+          <a:xfrm>
+            <a:off x="5349240" y="1005840"/>
+            <a:ext cx="6522415" cy="731520"/>
+          </a:xfrm>
+          <a:prstGeom prst="rect">
+            <a:avLst/>
+          </a:prstGeom>
+          <a:noFill/>
+          <a:ln/>
+        </p:spPr>
+        <p:txBody>
+          <a:bodyPr wrap="square" lIns="0" tIns="0" rIns="0" bIns="0" rtlCol="0" anchor="ctr">
+            <a:normAutofit/>
+          </a:bodyPr>
+          <a:lstStyle/>
+          <a:p>
+            <a:pPr algn="ctr" indent="0" marL="0">
+              <a:buNone/>
+            </a:pPr>
+            <a:r>
+              <a:rPr lang="en-US" sz="3600" b="1" dirty="0">
+                <a:solidFill>
+                  <a:srgbClr val="990011"/>
+                </a:solidFill>
+                <a:latin typeface="Times New Roman" pitchFamily="34" charset="0"/>
+                <a:ea typeface="Times New Roman" pitchFamily="34" charset="-122"/>
+                <a:cs typeface="Times New Roman" pitchFamily="34" charset="-120"/>
+              </a:rPr>
+              <a:t>Next Lesson</a:t>
+            </a:r>
+            <a:endParaRPr lang="en-US" sz="3600" dirty="0"/>
+          </a:p>
+        </p:txBody>
+      </p:sp>
+      <p:sp>
+        <p:nvSpPr>
+          <p:cNvPr id="5" name="Text 2"/>
+          <p:cNvSpPr/>
+          <p:nvPr/>
+        </p:nvSpPr>
+        <p:spPr>
+          <a:xfrm>
+            <a:off x="5349240" y="1783080"/>
+            <a:ext cx="6522415" cy="4663440"/>
+          </a:xfrm>
+          <a:prstGeom prst="rect">
+            <a:avLst/>
+          </a:prstGeom>
+          <a:noFill/>
+          <a:ln/>
+        </p:spPr>
+        <p:txBody>
+          <a:bodyPr wrap="square" lIns="0" tIns="0" rIns="0" bIns="0" rtlCol="0" anchor="ctr"/>
+          <a:lstStyle/>
+          <a:p>
+            <a:pPr algn="ctr" indent="0" marL="0">
+              <a:spcAft>
+                <a:spcPts val="800"/>
+              </a:spcAft>
+              <a:buNone/>
+            </a:pPr>
+            <a:r>
+              <a:rPr lang="en-US" sz="4000" b="1" dirty="0">
+                <a:solidFill>
+                  <a:srgbClr val="111111"/>
+                </a:solidFill>
+                <a:latin typeface="Times New Roman" pitchFamily="34" charset="0"/>
+                <a:ea typeface="Times New Roman" pitchFamily="34" charset="-122"/>
+                <a:cs typeface="Times New Roman" pitchFamily="34" charset="-120"/>
+              </a:rPr>
+              <a:t>Our next lesson will be on:</a:t>
+            </a:r>
+            <a:endParaRPr lang="en-US" sz="4000" dirty="0"/>
+          </a:p>
+          <a:p>
+            <a:pPr algn="ctr" indent="0" marL="0">
+              <a:spcAft>
+                <a:spcPts val="800"/>
+              </a:spcAft>
+              <a:buNone/>
+            </a:pPr>
+            <a:r>
+              <a:rPr lang="en-US" sz="4000" b="1" dirty="0">
+                <a:solidFill>
+                  <a:srgbClr val="990011"/>
+                </a:solidFill>
+                <a:latin typeface="Times New Roman" pitchFamily="34" charset="0"/>
+                <a:ea typeface="Times New Roman" pitchFamily="34" charset="-122"/>
+                <a:cs typeface="Times New Roman" pitchFamily="34" charset="-120"/>
+              </a:rPr>
+              <a:t>Lesson 38: Factors of Temperature</a:t>
+            </a:r>
+            <a:endParaRPr lang="en-US" sz="4000" dirty="0"/>
+          </a:p>
+        </p:txBody>
+      </p:sp>
+      <p:sp>
+        <p:nvSpPr>
+          <p:cNvPr id="25" name="Slide Number Placeholder 0"/>
+          <p:cNvSpPr>
+            <a:spLocks noGrp="1"/>
+          </p:cNvSpPr>
+          <p:nvPr>
+            <p:ph type="sldNum" sz="quarter" idx="4294967295"/>
+          </p:nvPr>
+        </p:nvSpPr>
+        <p:spPr>
+          <a:xfrm>
+            <a:off x="27432" y="91440"/>
+            <a:ext cx="585216" cy="475488"/>
+          </a:xfrm>
+          <a:prstGeom prst="rect">
+            <a:avLst/>
+          </a:prstGeom>
+          <a:extLst>
+            <a:ext uri="{C572A759-6A51-4108-AA02-DFA0A04FC94B}">
+              <ma14:wrappingTextBoxFlag xmlns:ma14="http://schemas.microsoft.com/office/mac/drawingml/2011/main" val="0"/>
+            </a:ext>
+          </a:extLst>
+        </p:spPr>
+        <p:txBody>
+          <a:bodyPr/>
+          <a:lstStyle>
+            <a:lvl1pPr>
+              <a:defRPr sz="2000">
+                <a:solidFill>
+                  <a:srgbClr val="FFFFFF"/>
+                </a:solidFill>
+                <a:latin typeface="Calibri"/>
+                <a:ea typeface="Calibri"/>
+                <a:cs typeface="Calibri"/>
+              </a:defRPr>
+            </a:lvl1pPr>
+          </a:lstStyle>
+          <a:p>
+            <a:pPr algn="ctr"/>
+            <a:fld id="{F7021451-1387-4CA6-816F-3879F97B5CBC}" type="slidenum">
+              <a:rPr b="1" lang="en-US"/>
+              <a:t>43</a:t>
+            </a:fld>
+            <a:endParaRPr lang="en-US"/>
+          </a:p>
+        </p:txBody>
+      </p:sp>
+    </p:spTree>
+  </p:cSld>
+  <p:clrMapOvr>
+    <a:masterClrMapping/>
+  </p:clrMapOvr>
+</p:sld>
+</file>
+
+<file path=ppt/slides/slide44.xml><?xml version="1.0" encoding="utf-8"?>
+<p:sld xmlns:a="http://schemas.openxmlformats.org/drawingml/2006/main" xmlns:r="http://schemas.openxmlformats.org/officeDocument/2006/relationships" xmlns:p="http://schemas.openxmlformats.org/presentationml/2006/main">
+  <p:cSld name="Slide 44">
+    <p:spTree>
+      <p:nvGrpSpPr>
+        <p:cNvPr id="1" name=""/>
+        <p:cNvGrpSpPr/>
+        <p:nvPr/>
+      </p:nvGrpSpPr>
+      <p:grpSpPr>
+        <a:xfrm>
+          <a:off x="0" y="0"/>
+          <a:ext cx="0" cy="0"/>
+          <a:chOff x="0" y="0"/>
+          <a:chExt cx="0" cy="0"/>
+        </a:xfrm>
+      </p:grpSpPr>
+      <p:sp>
+        <p:nvSpPr>
+          <p:cNvPr id="2" name="Text 0"/>
+          <p:cNvSpPr/>
+          <p:nvPr/>
+        </p:nvSpPr>
+        <p:spPr>
+          <a:xfrm>
+            <a:off x="457200" y="713232"/>
+            <a:ext cx="11368735" cy="274320"/>
+          </a:xfrm>
+          <a:prstGeom prst="rect">
+            <a:avLst/>
+          </a:prstGeom>
+          <a:noFill/>
+          <a:ln/>
+        </p:spPr>
+        <p:txBody>
+          <a:bodyPr wrap="square" lIns="0" tIns="0" rIns="0" bIns="0" rtlCol="0" anchor="ctr"/>
+          <a:lstStyle/>
+          <a:p>
+            <a:pPr algn="r" indent="0" marL="0">
+              <a:buNone/>
+            </a:pPr>
+            <a:r>
+              <a:rPr lang="en-US" sz="1400" b="1" dirty="0">
+                <a:solidFill>
+                  <a:srgbClr val="1C3F6E"/>
+                </a:solidFill>
+                <a:latin typeface="Calibri" pitchFamily="34" charset="0"/>
+                <a:ea typeface="Calibri" pitchFamily="34" charset="-122"/>
+                <a:cs typeface="Calibri" pitchFamily="34" charset="-120"/>
+              </a:rPr>
               <a:t>BILINGUAL GAME</a:t>
             </a:r>
             <a:endParaRPr lang="en-US" sz="1400" dirty="0"/>
@@ -14397,7 +15952,7 @@
       </p:sp>
       <p:graphicFrame>
         <p:nvGraphicFramePr>
-          <p:cNvPr id="41" name="Table 0"/>
+          <p:cNvPr id="45" name="Table 0"/>
           <p:cNvGraphicFramePr>
             <a:graphicFrameLocks noGrp="1"/>
           </p:cNvGraphicFramePr>
@@ -15709,7 +17264,7 @@
             <a:pPr algn="ctr"/>
             <a:fld id="{F7021451-1387-4CA6-816F-3879F97B5CBC}" type="slidenum">
               <a:rPr b="1" lang="en-US"/>
-              <a:t>40</a:t>
+              <a:t>44</a:t>
             </a:fld>
             <a:endParaRPr lang="en-US"/>
           </a:p>
@@ -15723,9 +17278,9 @@
 </p:sld>
 </file>
 
-<file path=ppt/slides/slide41.xml><?xml version="1.0" encoding="utf-8"?>
+<file path=ppt/slides/slide45.xml><?xml version="1.0" encoding="utf-8"?>
 <p:sld xmlns:a="http://schemas.openxmlformats.org/drawingml/2006/main" xmlns:r="http://schemas.openxmlformats.org/officeDocument/2006/relationships" xmlns:p="http://schemas.openxmlformats.org/presentationml/2006/main">
-  <p:cSld name="Slide 41">
+  <p:cSld name="Slide 45">
     <p:spTree>
       <p:nvGrpSpPr>
         <p:cNvPr id="1" name=""/>
@@ -15820,7 +17375,7 @@
       </p:sp>
       <p:graphicFrame>
         <p:nvGraphicFramePr>
-          <p:cNvPr id="42" name="Table 0"/>
+          <p:cNvPr id="46" name="Table 0"/>
           <p:cNvGraphicFramePr>
             <a:graphicFrameLocks noGrp="1"/>
           </p:cNvGraphicFramePr>
@@ -16442,7 +17997,7 @@
             <a:pPr algn="ctr"/>
             <a:fld id="{F7021451-1387-4CA6-816F-3879F97B5CBC}" type="slidenum">
               <a:rPr b="1" lang="en-US"/>
-              <a:t>41</a:t>
+              <a:t>45</a:t>
             </a:fld>
             <a:endParaRPr lang="en-US"/>
           </a:p>
@@ -16456,9 +18011,9 @@
 </p:sld>
 </file>
 
-<file path=ppt/slides/slide42.xml><?xml version="1.0" encoding="utf-8"?>
+<file path=ppt/slides/slide46.xml><?xml version="1.0" encoding="utf-8"?>
 <p:sld xmlns:a="http://schemas.openxmlformats.org/drawingml/2006/main" xmlns:r="http://schemas.openxmlformats.org/officeDocument/2006/relationships" xmlns:p="http://schemas.openxmlformats.org/presentationml/2006/main">
-  <p:cSld name="Slide 42">
+  <p:cSld name="Slide 46">
     <p:spTree>
       <p:nvGrpSpPr>
         <p:cNvPr id="1" name=""/>
@@ -16553,7 +18108,7 @@
       </p:sp>
       <p:graphicFrame>
         <p:nvGraphicFramePr>
-          <p:cNvPr id="43" name="Table 0"/>
+          <p:cNvPr id="47" name="Table 0"/>
           <p:cNvGraphicFramePr>
             <a:graphicFrameLocks noGrp="1"/>
           </p:cNvGraphicFramePr>
@@ -16663,7 +18218,7 @@
                           <a:ea typeface="Calibri" pitchFamily="34" charset="-122"/>
                           <a:cs typeface="Calibri" pitchFamily="34" charset="-120"/>
                         </a:rPr>
-                        <a:t>DEFINITIONS; Types of Local Winds.</a:t>
+                        <a:t>DEFINITIONS; Land and Sea Breezes; Mountain and Valley Winds; The Monsoon.</a:t>
                       </a:r>
                       <a:endParaRPr lang="en-US" sz="1600" dirty="0">
                         <a:latin typeface="Calibri" charset="0"/>
@@ -17313,7 +18868,7 @@
             <a:pPr algn="ctr"/>
             <a:fld id="{F7021451-1387-4CA6-816F-3879F97B5CBC}" type="slidenum">
               <a:rPr b="1" lang="en-US"/>
-              <a:t>42</a:t>
+              <a:t>46</a:t>
             </a:fld>
             <a:endParaRPr lang="en-US"/>
           </a:p>
@@ -17327,9 +18882,9 @@
 </p:sld>
 </file>
 
-<file path=ppt/slides/slide43.xml><?xml version="1.0" encoding="utf-8"?>
+<file path=ppt/slides/slide47.xml><?xml version="1.0" encoding="utf-8"?>
 <p:sld xmlns:a="http://schemas.openxmlformats.org/drawingml/2006/main" xmlns:r="http://schemas.openxmlformats.org/officeDocument/2006/relationships" xmlns:p="http://schemas.openxmlformats.org/presentationml/2006/main">
-  <p:cSld name="Slide 43">
+  <p:cSld name="Slide 47">
     <p:spTree>
       <p:nvGrpSpPr>
         <p:cNvPr id="1" name=""/>
@@ -17527,7 +19082,7 @@
                 <a:ea typeface="Calibri" pitchFamily="34" charset="-122"/>
                 <a:cs typeface="Calibri" pitchFamily="34" charset="-120"/>
               </a:rPr>
-              <a:t>Without the projector (Activity 1): draw the sea and the land with arrows.</a:t>
+              <a:t>Without the projector (Activity 1): draw the land and the sea with arrows.</a:t>
             </a:r>
             <a:endParaRPr lang="en-US" sz="2000" dirty="0"/>
           </a:p>
@@ -17548,7 +19103,7 @@
                 <a:ea typeface="Calibri" pitchFamily="34" charset="-122"/>
                 <a:cs typeface="Calibri" pitchFamily="34" charset="-120"/>
               </a:rPr>
-              <a:t>Without the projector (Activity 2): use the situation of Kribi.</a:t>
+              <a:t>Without the projector (Activity 2): describe the beach at Kribi at dawn.</a:t>
             </a:r>
             <a:endParaRPr lang="en-US" sz="2000" dirty="0"/>
           </a:p>
@@ -17569,7 +19124,7 @@
                 <a:ea typeface="Calibri" pitchFamily="34" charset="-122"/>
                 <a:cs typeface="Calibri" pitchFamily="34" charset="-120"/>
               </a:rPr>
-              <a:t>Without the projector (Activity 3): mention the Mandara Mountains near Mokolo.</a:t>
+              <a:t>Without the projector (Activity 3): draw a V-shaped valley with arrows.</a:t>
             </a:r>
             <a:endParaRPr lang="en-US" sz="2000" dirty="0"/>
           </a:p>
@@ -17617,7 +19172,7 @@
             <a:pPr algn="ctr"/>
             <a:fld id="{F7021451-1387-4CA6-816F-3879F97B5CBC}" type="slidenum">
               <a:rPr b="1" lang="en-US"/>
-              <a:t>43</a:t>
+              <a:t>47</a:t>
             </a:fld>
             <a:endParaRPr lang="en-US"/>
           </a:p>
@@ -17631,9 +19186,9 @@
 </p:sld>
 </file>
 
-<file path=ppt/slides/slide44.xml><?xml version="1.0" encoding="utf-8"?>
+<file path=ppt/slides/slide48.xml><?xml version="1.0" encoding="utf-8"?>
 <p:sld xmlns:a="http://schemas.openxmlformats.org/drawingml/2006/main" xmlns:r="http://schemas.openxmlformats.org/officeDocument/2006/relationships" xmlns:p="http://schemas.openxmlformats.org/presentationml/2006/main">
-  <p:cSld name="Slide 44">
+  <p:cSld name="Slide 48">
     <p:spTree>
       <p:nvGrpSpPr>
         <p:cNvPr id="1" name=""/>
@@ -17900,7 +19455,7 @@
             <a:pPr algn="ctr"/>
             <a:fld id="{F7021451-1387-4CA6-816F-3879F97B5CBC}" type="slidenum">
               <a:rPr b="1" lang="en-US"/>
-              <a:t>44</a:t>
+              <a:t>48</a:t>
             </a:fld>
             <a:endParaRPr lang="en-US"/>
           </a:p>
@@ -19106,7 +20661,7 @@
         <p:spPr>
           <a:xfrm>
             <a:off x="0" y="658368"/>
-            <a:ext cx="5120640" cy="5833872"/>
+            <a:ext cx="2468880" cy="5833872"/>
           </a:xfrm>
           <a:prstGeom prst="rect">
             <a:avLst/>
@@ -19121,8 +20676,8 @@
         </p:nvSpPr>
         <p:spPr>
           <a:xfrm>
-            <a:off x="5349240" y="1005840"/>
-            <a:ext cx="6522415" cy="731520"/>
+            <a:off x="2697480" y="1005840"/>
+            <a:ext cx="9174175" cy="731520"/>
           </a:xfrm>
           <a:prstGeom prst="rect">
             <a:avLst/>
@@ -19162,8 +20717,8 @@
         </p:nvSpPr>
         <p:spPr>
           <a:xfrm>
-            <a:off x="5349240" y="1783080"/>
-            <a:ext cx="6522415" cy="4663440"/>
+            <a:off x="2697480" y="1783080"/>
+            <a:ext cx="9174175" cy="4663440"/>
           </a:xfrm>
           <a:prstGeom prst="rect">
             <a:avLst/>
@@ -19190,7 +20745,7 @@
                 <a:ea typeface="Times New Roman" pitchFamily="34" charset="-122"/>
                 <a:cs typeface="Times New Roman" pitchFamily="34" charset="-120"/>
               </a:rPr>
-              <a:t>In Kribi, fishermen leave the beach very early, before sunrise, and come back in the afternoon. They say the wind pushes their canoes to the sea in the morning and back to land later.</a:t>
+              <a:t>In Kribi, fishermen leave the beach very early, before sunrise, and come back in the afternoon. They say that the wind pushes their canoes out to sea in the morning and back to land later. A pupil asks: "Why does the wind change direction between night and day?"</a:t>
             </a:r>
             <a:endParaRPr lang="en-US" sz="4000" dirty="0"/>
           </a:p>

--- a/lecons/F3/41_FORM4_LESSON37_Local_Winds.pptx
+++ b/lecons/F3/41_FORM4_LESSON37_Local_Winds.pptx
@@ -2397,7 +2397,7 @@
           <a:p>
             <a:r>
               <a:rPr lang="en-US" dirty="0"/>
-              <a:t>Let us copy Land and Sea Breezes. Land and sea breezes blow as follows. Copy the point on Sea breeze on the left, then draw the diagram on the right: the sea breeze. Give it a title and label it clearly.</a:t>
+              <a:t>Let us copy Land and Sea Breezes. Land and sea breezes and their use are the following. Copy the point on Sea breeze on the left, then draw the diagram on the right: the sea breeze. Give it a title and label it clearly.</a:t>
             </a:r>
             <a:endParaRPr lang="en-US" dirty="0"/>
           </a:p>
@@ -2749,7 +2749,7 @@
           <a:p>
             <a:r>
               <a:rPr lang="en-US" dirty="0"/>
-              <a:t>Let us copy Mountain and Valley Winds. Mountain and valley winds blow as follows. Copy the point on Valley (anabatic) breeze on the left, then draw the diagram on the right: valley and mountain breezes. Give it a title and label it clearly.</a:t>
+              <a:t>Let us copy Mountain and Valley Winds. Mountain and valley winds and their effect are the following. Copy the point on Valley (anabatic) breeze on the left, then draw the diagram on the right: valley and mountain breezes. Give it a title and label it clearly.</a:t>
             </a:r>
             <a:endParaRPr lang="en-US" dirty="0"/>
           </a:p>
@@ -2925,7 +2925,7 @@
           <a:p>
             <a:r>
               <a:rPr lang="en-US" dirty="0"/>
-              <a:t>Let us copy The Monsoon. The monsoon blows as follows. Copy the point on Summer monsoon on the left, then draw the diagram on the right: the monsoon. Give it a title and label it clearly.</a:t>
+              <a:t>Let us copy The Monsoon. The summer and winter monsoons and their main areas are the following. Copy the point on Summer monsoon on the left, then draw the diagram on the right: the monsoon. Give it a title and label it clearly.</a:t>
             </a:r>
             <a:endParaRPr lang="en-US" dirty="0"/>
           </a:p>
@@ -10980,7 +10980,7 @@
                 <a:ea typeface="Times New Roman" pitchFamily="34" charset="-122"/>
                 <a:cs typeface="Times New Roman" pitchFamily="34" charset="-120"/>
               </a:rPr>
-              <a:t>Land and sea breezes blow as follows:</a:t>
+              <a:t>Land and sea breezes and their use are the following:</a:t>
             </a:r>
             <a:endParaRPr lang="en-US" sz="3600" dirty="0"/>
           </a:p>
@@ -12795,7 +12795,7 @@
                 <a:ea typeface="Times New Roman" pitchFamily="34" charset="-122"/>
                 <a:cs typeface="Times New Roman" pitchFamily="34" charset="-120"/>
               </a:rPr>
-              <a:t>Mountain and valley winds blow as follows:</a:t>
+              <a:t>Mountain and valley winds and their effect are the following:</a:t>
             </a:r>
             <a:endParaRPr lang="en-US" sz="3600" dirty="0"/>
           </a:p>
@@ -13355,7 +13355,7 @@
               <a:buNone/>
             </a:pPr>
             <a:r>
-              <a:rPr lang="en-US" sz="3600" i="1" dirty="0">
+              <a:rPr lang="en-US" sz="3400" i="1" dirty="0">
                 <a:solidFill>
                   <a:srgbClr val="111111"/>
                 </a:solidFill>
@@ -13363,9 +13363,9 @@
                 <a:ea typeface="Times New Roman" pitchFamily="34" charset="-122"/>
                 <a:cs typeface="Times New Roman" pitchFamily="34" charset="-120"/>
               </a:rPr>
-              <a:t>The monsoon blows as follows:</a:t>
-            </a:r>
-            <a:endParaRPr lang="en-US" sz="3600" dirty="0"/>
+              <a:t>The summer and winter monsoons and their main areas are the following:</a:t>
+            </a:r>
+            <a:endParaRPr lang="en-US" sz="3400" dirty="0"/>
           </a:p>
           <a:p>
             <a:pPr algn="l" indent="0" marL="0">
@@ -13375,7 +13375,7 @@
               <a:buNone/>
             </a:pPr>
             <a:r>
-              <a:rPr lang="en-US" sz="3600" b="1" dirty="0">
+              <a:rPr lang="en-US" sz="3400" b="1" dirty="0">
                 <a:solidFill>
                   <a:srgbClr val="111111"/>
                 </a:solidFill>
@@ -13392,7 +13392,7 @@
               <a:buNone/>
             </a:pPr>
             <a:r>
-              <a:rPr lang="en-US" sz="3600" dirty="0">
+              <a:rPr lang="en-US" sz="3400" dirty="0">
                 <a:solidFill>
                   <a:srgbClr val="111111"/>
                 </a:solidFill>
@@ -13402,7 +13402,7 @@
               </a:rPr>
               <a:t>The land is hotter than the sea, so moist wind blows from the sea to the land and brings heavy rain.</a:t>
             </a:r>
-            <a:endParaRPr lang="en-US" sz="3600" dirty="0"/>
+            <a:endParaRPr lang="en-US" sz="3400" dirty="0"/>
           </a:p>
         </p:txBody>
       </p:sp>

--- a/lecons/F3/41_FORM4_LESSON37_Local_Winds.pptx
+++ b/lecons/F3/41_FORM4_LESSON37_Local_Winds.pptx
@@ -3453,7 +3453,7 @@
           <a:p>
             <a:r>
               <a:rPr lang="en-US" dirty="0"/>
-              <a:t>Before we start the new lesson, let us correct the homework I gave you at the end of Lesson 36: Pressure Belts and Planetary Winds. The question was: Ask someone who has lived by the sea (Douala, Kribi or Limbe) or in the mountains (Buea, Mokolo) whether the wind changes between day and night. Write down what they say. Take out your exercise books.</a:t>
+              <a:t>Before we start the new lesson, let us correct the homework I gave you at the end of Lesson 36: Pressure Belts and Planetary Winds. The question was: Name the wind that blows from the sea to the land by day. Take out your exercise books.</a:t>
             </a:r>
             <a:endParaRPr lang="en-US" dirty="0"/>
           </a:p>
@@ -3717,7 +3717,7 @@
           <a:p>
             <a:r>
               <a:rPr lang="en-US" dirty="0"/>
-              <a:t>For your homework: Compare the temperature of Garoua with that of Ngaoundéré (ask an adult who has travelled there). Write one sentence to say which town is cooler and one possible reason. We shall correct it at the beginning of our next lesson.</a:t>
+              <a:t>For your homework: Give two factors of temperature. We shall correct it at the beginning of our next lesson.</a:t>
             </a:r>
             <a:endParaRPr lang="en-US" dirty="0"/>
           </a:p>
@@ -4333,7 +4333,7 @@
           <a:p>
             <a:r>
               <a:rPr lang="en-US" dirty="0"/>
-              <a:t>Here is a good answer. By the sea, the wind blows from the sea by day (sea breeze) and from the land at night (land breeze). In the mountains, it blows up the slopes by day and down the slopes at night. Compare it with your own answer and correct your work in red.</a:t>
+              <a:t>Here is a good answer. The sea breeze. Compare it with your own answer and correct your work in red.</a:t>
             </a:r>
             <a:endParaRPr lang="en-US" dirty="0"/>
           </a:p>
@@ -14747,7 +14747,7 @@
         <p:spPr>
           <a:xfrm>
             <a:off x="0" y="658368"/>
-            <a:ext cx="2468880" cy="5833872"/>
+            <a:ext cx="5120640" cy="5833872"/>
           </a:xfrm>
           <a:prstGeom prst="rect">
             <a:avLst/>
@@ -14762,8 +14762,8 @@
         </p:nvSpPr>
         <p:spPr>
           <a:xfrm>
-            <a:off x="2697480" y="1005840"/>
-            <a:ext cx="9174175" cy="731520"/>
+            <a:off x="5349240" y="1005840"/>
+            <a:ext cx="6522415" cy="731520"/>
           </a:xfrm>
           <a:prstGeom prst="rect">
             <a:avLst/>
@@ -14803,8 +14803,8 @@
         </p:nvSpPr>
         <p:spPr>
           <a:xfrm>
-            <a:off x="2697480" y="1783080"/>
-            <a:ext cx="9174175" cy="4663440"/>
+            <a:off x="5349240" y="1783080"/>
+            <a:ext cx="6522415" cy="4663440"/>
           </a:xfrm>
           <a:prstGeom prst="rect">
             <a:avLst/>
@@ -14851,7 +14851,7 @@
                 <a:ea typeface="Times New Roman" pitchFamily="34" charset="-122"/>
                 <a:cs typeface="Times New Roman" pitchFamily="34" charset="-120"/>
               </a:rPr>
-              <a:t>Ask someone who has lived by the sea (Douala, Kribi or Limbe) or in the mountains (Buea, Mokolo) whether the wind changes between day and night. Write down what they say.</a:t>
+              <a:t>Name the wind that blows from the sea to the land by day.</a:t>
             </a:r>
             <a:endParaRPr lang="en-US" sz="4000" dirty="0"/>
           </a:p>
@@ -15554,7 +15554,7 @@
                 <a:ea typeface="Times New Roman" pitchFamily="34" charset="-122"/>
                 <a:cs typeface="Times New Roman" pitchFamily="34" charset="-120"/>
               </a:rPr>
-              <a:t>Compare the temperature of Garoua with that of Ngaoundéré (ask an adult who has travelled there). Write one sentence to say which town is cooler and one possible reason.</a:t>
+              <a:t>Give two factors of temperature.</a:t>
             </a:r>
             <a:endParaRPr lang="en-US" sz="4000" dirty="0"/>
           </a:p>
@@ -18494,7 +18494,7 @@
                           <a:ea typeface="Calibri" pitchFamily="34" charset="-122"/>
                           <a:cs typeface="Calibri" pitchFamily="34" charset="-120"/>
                         </a:rPr>
-                        <a:t>Compare the temperature of Garoua with that of Ngaoundéré (ask an adult who has travelled there). Write one sentence to say which town is cooler and one possible reason.</a:t>
+                        <a:t>Give two factors of temperature.</a:t>
                       </a:r>
                       <a:endParaRPr lang="en-US" sz="1600" dirty="0">
                         <a:latin typeface="Calibri" charset="0"/>
@@ -19626,7 +19626,7 @@
                 <a:ea typeface="Times New Roman" pitchFamily="34" charset="-122"/>
                 <a:cs typeface="Times New Roman" pitchFamily="34" charset="-120"/>
               </a:rPr>
-              <a:t>By the sea, the wind blows from the sea by day (sea breeze) and from the land at night (land breeze). In the mountains, it blows up the slopes by day and down the slopes at night.</a:t>
+              <a:t>The sea breeze.</a:t>
             </a:r>
             <a:endParaRPr lang="en-US" sz="4000" dirty="0"/>
           </a:p>
